--- a/RQ4b.pptx
+++ b/RQ4b.pptx
@@ -152,7 +152,7 @@
           </c:tx>
           <c:spPr>
             <a:solidFill>
-              <a:srgbClr val="1A6B3A"/>
+              <a:srgbClr val="2A3D5A"/>
             </a:solidFill>
             <a:effectLst/>
           </c:spPr>
@@ -163,12 +163,28 @@
             <c:bubble3D val="0"/>
             <c:extLst>
               <c:ext xmlns:c16="http://schemas.microsoft.com/office/drawing/2014/chart" uri="{C3380CC4-5D6E-409C-BE32-E72D297353CC}">
-                <c16:uniqueId val="{00000001-12FE-B743-9D7F-C8F39405B72A}"/>
+                <c16:uniqueId val="{00000001-7975-D24F-8B2F-7AABC83EC6F1}"/>
               </c:ext>
             </c:extLst>
           </c:dPt>
           <c:dPt>
             <c:idx val="1"/>
+            <c:invertIfNegative val="0"/>
+            <c:bubble3D val="0"/>
+            <c:spPr>
+              <a:solidFill>
+                <a:srgbClr val="1A6B3A"/>
+              </a:solidFill>
+              <a:effectLst/>
+            </c:spPr>
+            <c:extLst>
+              <c:ext xmlns:c16="http://schemas.microsoft.com/office/drawing/2014/chart" uri="{C3380CC4-5D6E-409C-BE32-E72D297353CC}">
+                <c16:uniqueId val="{00000003-7975-D24F-8B2F-7AABC83EC6F1}"/>
+              </c:ext>
+            </c:extLst>
+          </c:dPt>
+          <c:dPt>
+            <c:idx val="2"/>
             <c:invertIfNegative val="0"/>
             <c:bubble3D val="0"/>
             <c:spPr>
@@ -179,7 +195,7 @@
             </c:spPr>
             <c:extLst>
               <c:ext xmlns:c16="http://schemas.microsoft.com/office/drawing/2014/chart" uri="{C3380CC4-5D6E-409C-BE32-E72D297353CC}">
-                <c16:uniqueId val="{00000003-12FE-B743-9D7F-C8F39405B72A}"/>
+                <c16:uniqueId val="{00000005-7975-D24F-8B2F-7AABC83EC6F1}"/>
               </c:ext>
             </c:extLst>
           </c:dPt>
@@ -223,30 +239,37 @@
           </c:dLbls>
           <c:cat>
             <c:strRef>
-              <c:f>Sheet1!$A$2:$A$3</c:f>
+              <c:f>Sheet1!$A$2:$A$4</c:f>
               <c:strCache>
-                <c:ptCount val="2"/>
+                <c:ptCount val="3"/>
                 <c:pt idx="0">
-                  <c:v>With Rule
-in Place</c:v>
+                  <c:v>Pre-Rule
+(2019-21)</c:v>
                 </c:pt>
                 <c:pt idx="1">
-                  <c:v>Without
-the Rule</c:v>
+                  <c:v>With Rule
+(2024-25)</c:v>
+                </c:pt>
+                <c:pt idx="2">
+                  <c:v>Rule
+Removed</c:v>
                 </c:pt>
               </c:strCache>
             </c:strRef>
           </c:cat>
           <c:val>
             <c:numRef>
-              <c:f>Sheet1!$B$2:$B$3</c:f>
+              <c:f>Sheet1!$B$2:$B$4</c:f>
               <c:numCache>
                 <c:formatCode>General</c:formatCode>
-                <c:ptCount val="2"/>
+                <c:ptCount val="3"/>
                 <c:pt idx="0">
+                  <c:v>19.100000000000001</c:v>
+                </c:pt>
+                <c:pt idx="1">
                   <c:v>19.399999999999999</c:v>
                 </c:pt>
-                <c:pt idx="1">
+                <c:pt idx="2">
                   <c:v>22.5</c:v>
                 </c:pt>
               </c:numCache>
@@ -254,7 +277,7 @@
           </c:val>
           <c:extLst>
             <c:ext xmlns:c16="http://schemas.microsoft.com/office/drawing/2014/chart" uri="{C3380CC4-5D6E-409C-BE32-E72D297353CC}">
-              <c16:uniqueId val="{00000004-12FE-B743-9D7F-C8F39405B72A}"/>
+              <c16:uniqueId val="{00000006-7975-D24F-8B2F-7AABC83EC6F1}"/>
             </c:ext>
           </c:extLst>
         </c:ser>
@@ -296,7 +319,7 @@
           <a:lstStyle/>
           <a:p>
             <a:pPr>
-              <a:defRPr sz="1200" b="0" i="0" u="none" strike="noStrike">
+              <a:defRPr sz="800" b="0" i="0" u="none" strike="noStrike">
                 <a:solidFill>
                   <a:srgbClr val="444444"/>
                 </a:solidFill>
@@ -419,7 +442,7 @@
     </p:spTree>
     <p:extLst>
       <p:ext uri="{BB962C8B-B14F-4D97-AF65-F5344CB8AC3E}">
-        <p14:creationId xmlns:p14="http://schemas.microsoft.com/office/powerpoint/2010/main" val="251074687"/>
+        <p14:creationId xmlns:p14="http://schemas.microsoft.com/office/powerpoint/2010/main" val="404534971"/>
       </p:ext>
     </p:extLst>
   </p:cSld>
@@ -3756,35 +3779,35 @@
         </p:nvGraphicFramePr>
         <p:xfrm>
           <a:off x="1691640" y="1261872"/>
-          <a:ext cx="10195560" cy="4206240"/>
+          <a:ext cx="10195560" cy="5352288"/>
         </p:xfrm>
         <a:graphic>
           <a:graphicData uri="http://schemas.openxmlformats.org/drawingml/2006/table">
             <a:tbl>
               <a:tblPr/>
               <a:tblGrid>
-                <a:gridCol w="594360">
+                <a:gridCol w="566928">
                   <a:extLst>
                     <a:ext uri="{9D8B030D-6E8A-4147-A177-3AD203B41FA5}">
                       <a16:colId xmlns:a16="http://schemas.microsoft.com/office/drawing/2014/main" val="20000"/>
                     </a:ext>
                   </a:extLst>
                 </a:gridCol>
-                <a:gridCol w="2103120">
+                <a:gridCol w="1993392">
                   <a:extLst>
                     <a:ext uri="{9D8B030D-6E8A-4147-A177-3AD203B41FA5}">
                       <a16:colId xmlns:a16="http://schemas.microsoft.com/office/drawing/2014/main" val="20001"/>
                     </a:ext>
                   </a:extLst>
                 </a:gridCol>
-                <a:gridCol w="3566160">
+                <a:gridCol w="3794760">
                   <a:extLst>
                     <a:ext uri="{9D8B030D-6E8A-4147-A177-3AD203B41FA5}">
                       <a16:colId xmlns:a16="http://schemas.microsoft.com/office/drawing/2014/main" val="20002"/>
                     </a:ext>
                   </a:extLst>
                 </a:gridCol>
-                <a:gridCol w="3931920">
+                <a:gridCol w="3840480">
                   <a:extLst>
                     <a:ext uri="{9D8B030D-6E8A-4147-A177-3AD203B41FA5}">
                       <a16:colId xmlns:a16="http://schemas.microsoft.com/office/drawing/2014/main" val="20003"/>
@@ -3792,7 +3815,7 @@
                   </a:extLst>
                 </a:gridCol>
               </a:tblGrid>
-              <a:tr h="749808">
+              <a:tr h="658368">
                 <a:tc>
                   <a:txBody>
                     <a:bodyPr/>
@@ -3802,7 +3825,7 @@
                         <a:buNone/>
                       </a:pPr>
                       <a:r>
-                        <a:rPr lang="en-US" sz="1100" b="1" dirty="0">
+                        <a:rPr lang="en-US" sz="1000" b="1" dirty="0">
                           <a:solidFill>
                             <a:srgbClr val="FFFFFF"/>
                           </a:solidFill>
@@ -3812,7 +3835,7 @@
                         </a:rPr>
                         <a:t>RQ</a:t>
                       </a:r>
-                      <a:endParaRPr lang="en-US" sz="1100" dirty="0">
+                      <a:endParaRPr lang="en-US" sz="1000" dirty="0">
                         <a:latin typeface="Calibri" charset="0"/>
                         <a:ea typeface="Calibri" charset="0"/>
                         <a:cs typeface="Calibri" charset="0"/>
@@ -3870,7 +3893,7 @@
                         <a:buNone/>
                       </a:pPr>
                       <a:r>
-                        <a:rPr lang="en-US" sz="1100" b="1" dirty="0">
+                        <a:rPr lang="en-US" sz="1000" b="1" dirty="0">
                           <a:solidFill>
                             <a:srgbClr val="FFFFFF"/>
                           </a:solidFill>
@@ -3880,7 +3903,7 @@
                         </a:rPr>
                         <a:t>Question</a:t>
                       </a:r>
-                      <a:endParaRPr lang="en-US" sz="1100" dirty="0">
+                      <a:endParaRPr lang="en-US" sz="1000" dirty="0">
                         <a:latin typeface="Calibri" charset="0"/>
                         <a:ea typeface="Calibri" charset="0"/>
                         <a:cs typeface="Calibri" charset="0"/>
@@ -3938,7 +3961,7 @@
                         <a:buNone/>
                       </a:pPr>
                       <a:r>
-                        <a:rPr lang="en-US" sz="1100" b="1" dirty="0">
+                        <a:rPr lang="en-US" sz="1000" b="1" dirty="0">
                           <a:solidFill>
                             <a:srgbClr val="FFFFFF"/>
                           </a:solidFill>
@@ -3948,7 +3971,7 @@
                         </a:rPr>
                         <a:t>Core Finding</a:t>
                       </a:r>
-                      <a:endParaRPr lang="en-US" sz="1100" dirty="0">
+                      <a:endParaRPr lang="en-US" sz="1000" dirty="0">
                         <a:latin typeface="Calibri" charset="0"/>
                         <a:ea typeface="Calibri" charset="0"/>
                         <a:cs typeface="Calibri" charset="0"/>
@@ -4006,7 +4029,7 @@
                         <a:buNone/>
                       </a:pPr>
                       <a:r>
-                        <a:rPr lang="en-US" sz="1100" b="1" dirty="0">
+                        <a:rPr lang="en-US" sz="1000" b="1" dirty="0">
                           <a:solidFill>
                             <a:srgbClr val="FFFFFF"/>
                           </a:solidFill>
@@ -4016,7 +4039,7 @@
                         </a:rPr>
                         <a:t>Key Numbers</a:t>
                       </a:r>
-                      <a:endParaRPr lang="en-US" sz="1100" dirty="0">
+                      <a:endParaRPr lang="en-US" sz="1000" dirty="0">
                         <a:latin typeface="Calibri" charset="0"/>
                         <a:ea typeface="Calibri" charset="0"/>
                         <a:cs typeface="Calibri" charset="0"/>
@@ -4071,7 +4094,7 @@
                   </a:ext>
                 </a:extLst>
               </a:tr>
-              <a:tr h="749808">
+              <a:tr h="658368">
                 <a:tc>
                   <a:txBody>
                     <a:bodyPr/>
@@ -4081,7 +4104,7 @@
                         <a:buNone/>
                       </a:pPr>
                       <a:r>
-                        <a:rPr lang="en-US" sz="1100" b="1" dirty="0">
+                        <a:rPr lang="en-US" sz="1000" b="1" dirty="0">
                           <a:solidFill>
                             <a:srgbClr val="1A2744"/>
                           </a:solidFill>
@@ -4091,7 +4114,7 @@
                         </a:rPr>
                         <a:t>RQ 1</a:t>
                       </a:r>
-                      <a:endParaRPr lang="en-US" sz="1100" dirty="0">
+                      <a:endParaRPr lang="en-US" sz="1000" dirty="0">
                         <a:latin typeface="Calibri" charset="0"/>
                         <a:ea typeface="Calibri" charset="0"/>
                         <a:cs typeface="Calibri" charset="0"/>
@@ -4149,7 +4172,7 @@
                         <a:buNone/>
                       </a:pPr>
                       <a:r>
-                        <a:rPr lang="en-US" sz="1100" dirty="0">
+                        <a:rPr lang="en-US" sz="1000" dirty="0">
                           <a:solidFill>
                             <a:srgbClr val="000000"/>
                           </a:solidFill>
@@ -4157,9 +4180,9 @@
                           <a:ea typeface="Calibri" pitchFamily="34" charset="-122"/>
                           <a:cs typeface="Calibri" pitchFamily="34" charset="-120"/>
                         </a:rPr>
-                        <a:t>How much capital buffer before the rule?</a:t>
+                        <a:t>How much capital buffer did complex CUs hold before the rule?</a:t>
                       </a:r>
-                      <a:endParaRPr lang="en-US" sz="1100" dirty="0">
+                      <a:endParaRPr lang="en-US" sz="1000" dirty="0">
                         <a:latin typeface="Calibri" charset="0"/>
                         <a:ea typeface="Calibri" charset="0"/>
                         <a:cs typeface="Calibri" charset="0"/>
@@ -4217,7 +4240,7 @@
                         <a:buNone/>
                       </a:pPr>
                       <a:r>
-                        <a:rPr lang="en-US" sz="1100" dirty="0">
+                        <a:rPr lang="en-US" sz="1000" dirty="0">
                           <a:solidFill>
                             <a:srgbClr val="000000"/>
                           </a:solidFill>
@@ -4225,9 +4248,9 @@
                           <a:ea typeface="Calibri" pitchFamily="34" charset="-122"/>
                           <a:cs typeface="Calibri" pitchFamily="34" charset="-120"/>
                         </a:rPr>
-                        <a:t>Critically thin — very little room to absorb the new requirement</a:t>
+                        <a:t>Critically thin — most institutions held only the bare minimum, leaving almost no cushion to absorb the new requirement</a:t>
                       </a:r>
-                      <a:endParaRPr lang="en-US" sz="1100" dirty="0">
+                      <a:endParaRPr lang="en-US" sz="1000" dirty="0">
                         <a:latin typeface="Calibri" charset="0"/>
                         <a:ea typeface="Calibri" charset="0"/>
                         <a:cs typeface="Calibri" charset="0"/>
@@ -4285,7 +4308,7 @@
                         <a:buNone/>
                       </a:pPr>
                       <a:r>
-                        <a:rPr lang="en-US" sz="1100" dirty="0">
+                        <a:rPr lang="en-US" sz="1000" dirty="0">
                           <a:solidFill>
                             <a:srgbClr val="000000"/>
                           </a:solidFill>
@@ -4293,9 +4316,9 @@
                           <a:ea typeface="Calibri" pitchFamily="34" charset="-122"/>
                           <a:cs typeface="Calibri" pitchFamily="34" charset="-120"/>
                         </a:rPr>
-                        <a:t>72bp average buffer  ·  696 complex CUs</a:t>
+                        <a:t>72bp average buffer above 10% threshold  ·  696 complex CUs</a:t>
                       </a:r>
-                      <a:endParaRPr lang="en-US" sz="1100" dirty="0">
+                      <a:endParaRPr lang="en-US" sz="1000" dirty="0">
                         <a:latin typeface="Calibri" charset="0"/>
                         <a:ea typeface="Calibri" charset="0"/>
                         <a:cs typeface="Calibri" charset="0"/>
@@ -4350,7 +4373,7 @@
                   </a:ext>
                 </a:extLst>
               </a:tr>
-              <a:tr h="749808">
+              <a:tr h="658368">
                 <a:tc>
                   <a:txBody>
                     <a:bodyPr/>
@@ -4360,7 +4383,7 @@
                         <a:buNone/>
                       </a:pPr>
                       <a:r>
-                        <a:rPr lang="en-US" sz="1100" b="1" dirty="0">
+                        <a:rPr lang="en-US" sz="1000" b="1" dirty="0">
                           <a:solidFill>
                             <a:srgbClr val="1A2744"/>
                           </a:solidFill>
@@ -4370,7 +4393,7 @@
                         </a:rPr>
                         <a:t>RQ 2</a:t>
                       </a:r>
-                      <a:endParaRPr lang="en-US" sz="1100" dirty="0">
+                      <a:endParaRPr lang="en-US" sz="1000" dirty="0">
                         <a:latin typeface="Calibri" charset="0"/>
                         <a:ea typeface="Calibri" charset="0"/>
                         <a:cs typeface="Calibri" charset="0"/>
@@ -4428,7 +4451,7 @@
                         <a:buNone/>
                       </a:pPr>
                       <a:r>
-                        <a:rPr lang="en-US" sz="1100" dirty="0">
+                        <a:rPr lang="en-US" sz="1000" dirty="0">
                           <a:solidFill>
                             <a:srgbClr val="000000"/>
                           </a:solidFill>
@@ -4436,9 +4459,9 @@
                           <a:ea typeface="Calibri" pitchFamily="34" charset="-122"/>
                           <a:cs typeface="Calibri" pitchFamily="34" charset="-120"/>
                         </a:rPr>
-                        <a:t>Did complex CUs hold more capital?</a:t>
+                        <a:t>Did complex CUs hold more capital after the rule?</a:t>
                       </a:r>
-                      <a:endParaRPr lang="en-US" sz="1100" dirty="0">
+                      <a:endParaRPr lang="en-US" sz="1000" dirty="0">
                         <a:latin typeface="Calibri" charset="0"/>
                         <a:ea typeface="Calibri" charset="0"/>
                         <a:cs typeface="Calibri" charset="0"/>
@@ -4496,7 +4519,7 @@
                         <a:buNone/>
                       </a:pPr>
                       <a:r>
-                        <a:rPr lang="en-US" sz="1100" dirty="0">
+                        <a:rPr lang="en-US" sz="1000" dirty="0">
                           <a:solidFill>
                             <a:srgbClr val="000000"/>
                           </a:solidFill>
@@ -4504,9 +4527,9 @@
                           <a:ea typeface="Calibri" pitchFamily="34" charset="-122"/>
                           <a:cs typeface="Calibri" pitchFamily="34" charset="-120"/>
                         </a:rPr>
-                        <a:t>Mixed — average capital rose but well-cap share fell</a:t>
+                        <a:t>Mixed. Capital rose briefly then retreated; near-threshold CUs ended worse off. The rule raised the bar faster than capital could accumulate — and neither lending nor well-capitalized status recovered</a:t>
                       </a:r>
-                      <a:endParaRPr lang="en-US" sz="1100" dirty="0">
+                      <a:endParaRPr lang="en-US" sz="1000" dirty="0">
                         <a:latin typeface="Calibri" charset="0"/>
                         <a:ea typeface="Calibri" charset="0"/>
                         <a:cs typeface="Calibri" charset="0"/>
@@ -4564,7 +4587,7 @@
                         <a:buNone/>
                       </a:pPr>
                       <a:r>
-                        <a:rPr lang="en-US" sz="1100" dirty="0">
+                        <a:rPr lang="en-US" sz="1000" dirty="0">
                           <a:solidFill>
                             <a:srgbClr val="000000"/>
                           </a:solidFill>
@@ -4572,9 +4595,9 @@
                           <a:ea typeface="Calibri" pitchFamily="34" charset="-122"/>
                           <a:cs typeface="Calibri" pitchFamily="34" charset="-120"/>
                         </a:rPr>
-                        <a:t>NW ratio +46bp  ·  Well-cap probability −3.7pp</a:t>
+                        <a:t>NW ratio +46bp (fades after Q+2)  ·  Well-cap probability −3.7pp  ·  Loan growth: no recovery</a:t>
                       </a:r>
-                      <a:endParaRPr lang="en-US" sz="1100" dirty="0">
+                      <a:endParaRPr lang="en-US" sz="1000" dirty="0">
                         <a:latin typeface="Calibri" charset="0"/>
                         <a:ea typeface="Calibri" charset="0"/>
                         <a:cs typeface="Calibri" charset="0"/>
@@ -4629,7 +4652,7 @@
                   </a:ext>
                 </a:extLst>
               </a:tr>
-              <a:tr h="749808">
+              <a:tr h="658368">
                 <a:tc>
                   <a:txBody>
                     <a:bodyPr/>
@@ -4639,7 +4662,7 @@
                         <a:buNone/>
                       </a:pPr>
                       <a:r>
-                        <a:rPr lang="en-US" sz="1100" b="1" dirty="0">
+                        <a:rPr lang="en-US" sz="1000" b="1" dirty="0">
                           <a:solidFill>
                             <a:srgbClr val="1A2744"/>
                           </a:solidFill>
@@ -4649,7 +4672,7 @@
                         </a:rPr>
                         <a:t>RQ 3</a:t>
                       </a:r>
-                      <a:endParaRPr lang="en-US" sz="1100" dirty="0">
+                      <a:endParaRPr lang="en-US" sz="1000" dirty="0">
                         <a:latin typeface="Calibri" charset="0"/>
                         <a:ea typeface="Calibri" charset="0"/>
                         <a:cs typeface="Calibri" charset="0"/>
@@ -4707,7 +4730,7 @@
                         <a:buNone/>
                       </a:pPr>
                       <a:r>
-                        <a:rPr lang="en-US" sz="1100" dirty="0">
+                        <a:rPr lang="en-US" sz="1000" dirty="0">
                           <a:solidFill>
                             <a:srgbClr val="000000"/>
                           </a:solidFill>
@@ -4715,9 +4738,9 @@
                           <a:ea typeface="Calibri" pitchFamily="34" charset="-122"/>
                           <a:cs typeface="Calibri" pitchFamily="34" charset="-120"/>
                         </a:rPr>
-                        <a:t>Did loan rate spreads change?</a:t>
+                        <a:t>Did loan rates and lending change?</a:t>
                       </a:r>
-                      <a:endParaRPr lang="en-US" sz="1100" dirty="0">
+                      <a:endParaRPr lang="en-US" sz="1000" dirty="0">
                         <a:latin typeface="Calibri" charset="0"/>
                         <a:ea typeface="Calibri" charset="0"/>
                         <a:cs typeface="Calibri" charset="0"/>
@@ -4775,7 +4798,7 @@
                         <a:buNone/>
                       </a:pPr>
                       <a:r>
-                        <a:rPr lang="en-US" sz="1100" dirty="0">
+                        <a:rPr lang="en-US" sz="1000" dirty="0">
                           <a:solidFill>
                             <a:srgbClr val="000000"/>
                           </a:solidFill>
@@ -4783,9 +4806,9 @@
                           <a:ea typeface="Calibri" pitchFamily="34" charset="-122"/>
                           <a:cs typeface="Calibri" pitchFamily="34" charset="-120"/>
                         </a:rPr>
-                        <a:t>Yes — complete pass-through confirmed across every loan type</a:t>
+                        <a:t>Yes — rates rose across every loan type and lending contracted. Both effects are large, persistent, and show no sign of reversing. The entire regulatory cost was passed to member-borrowers</a:t>
                       </a:r>
-                      <a:endParaRPr lang="en-US" sz="1100" dirty="0">
+                      <a:endParaRPr lang="en-US" sz="1000" dirty="0">
                         <a:latin typeface="Calibri" charset="0"/>
                         <a:ea typeface="Calibri" charset="0"/>
                         <a:cs typeface="Calibri" charset="0"/>
@@ -4843,7 +4866,7 @@
                         <a:buNone/>
                       </a:pPr>
                       <a:r>
-                        <a:rPr lang="en-US" sz="1100" dirty="0">
+                        <a:rPr lang="en-US" sz="1000" dirty="0">
                           <a:solidFill>
                             <a:srgbClr val="000000"/>
                           </a:solidFill>
@@ -4851,9 +4874,9 @@
                           <a:ea typeface="Calibri" pitchFamily="34" charset="-122"/>
                           <a:cs typeface="Calibri" pitchFamily="34" charset="-120"/>
                         </a:rPr>
-                        <a:t>Mortgage +73bp  ·  New auto +56bp  ·  Used auto +76bp  ·  Commercial +66bp</a:t>
+                        <a:t>Mortgage +73bp  ·  New auto +56bp  ·  Used auto +76bp  ·  Commercial +66bp  ·  Loan growth −0.44pp/qtr</a:t>
                       </a:r>
-                      <a:endParaRPr lang="en-US" sz="1100" dirty="0">
+                      <a:endParaRPr lang="en-US" sz="1000" dirty="0">
                         <a:latin typeface="Calibri" charset="0"/>
                         <a:ea typeface="Calibri" charset="0"/>
                         <a:cs typeface="Calibri" charset="0"/>
@@ -4908,7 +4931,7 @@
                   </a:ext>
                 </a:extLst>
               </a:tr>
-              <a:tr h="749808">
+              <a:tr h="658368">
                 <a:tc>
                   <a:txBody>
                     <a:bodyPr/>
@@ -4918,7 +4941,7 @@
                         <a:buNone/>
                       </a:pPr>
                       <a:r>
-                        <a:rPr lang="en-US" sz="1100" b="1" dirty="0">
+                        <a:rPr lang="en-US" sz="1000" b="1" dirty="0">
                           <a:solidFill>
                             <a:srgbClr val="1A2744"/>
                           </a:solidFill>
@@ -4928,7 +4951,7 @@
                         </a:rPr>
                         <a:t>RQ 4</a:t>
                       </a:r>
-                      <a:endParaRPr lang="en-US" sz="1100" dirty="0">
+                      <a:endParaRPr lang="en-US" sz="1000" dirty="0">
                         <a:latin typeface="Calibri" charset="0"/>
                         <a:ea typeface="Calibri" charset="0"/>
                         <a:cs typeface="Calibri" charset="0"/>
@@ -4986,7 +5009,7 @@
                         <a:buNone/>
                       </a:pPr>
                       <a:r>
-                        <a:rPr lang="en-US" sz="1100" dirty="0">
+                        <a:rPr lang="en-US" sz="1000" dirty="0">
                           <a:solidFill>
                             <a:srgbClr val="000000"/>
                           </a:solidFill>
@@ -4994,9 +5017,9 @@
                           <a:ea typeface="Calibri" pitchFamily="34" charset="-122"/>
                           <a:cs typeface="Calibri" pitchFamily="34" charset="-120"/>
                         </a:rPr>
-                        <a:t>Did asset and loan growth change?</a:t>
+                        <a:t>Did portfolio composition change?</a:t>
                       </a:r>
-                      <a:endParaRPr lang="en-US" sz="1100" dirty="0">
+                      <a:endParaRPr lang="en-US" sz="1000" dirty="0">
                         <a:latin typeface="Calibri" charset="0"/>
                         <a:ea typeface="Calibri" charset="0"/>
                         <a:cs typeface="Calibri" charset="0"/>
@@ -5054,7 +5077,7 @@
                         <a:buNone/>
                       </a:pPr>
                       <a:r>
-                        <a:rPr lang="en-US" sz="1100" dirty="0">
+                        <a:rPr lang="en-US" sz="1000" dirty="0">
                           <a:solidFill>
                             <a:srgbClr val="000000"/>
                           </a:solidFill>
@@ -5062,9 +5085,9 @@
                           <a:ea typeface="Calibri" pitchFamily="34" charset="-122"/>
                           <a:cs typeface="Calibri" pitchFamily="34" charset="-120"/>
                         </a:rPr>
-                        <a:t>Yes — both fell sharply with no recovery; auto exit is permanent</a:t>
+                        <a:t>Yes — auto loans exited permanently as CUs shifted to lower-risk-weight mortgages. This pattern did not occur during the 2008 crisis, isolating the RBC rule as the cause</a:t>
                       </a:r>
-                      <a:endParaRPr lang="en-US" sz="1100" dirty="0">
+                      <a:endParaRPr lang="en-US" sz="1000" dirty="0">
                         <a:latin typeface="Calibri" charset="0"/>
                         <a:ea typeface="Calibri" charset="0"/>
                         <a:cs typeface="Calibri" charset="0"/>
@@ -5122,7 +5145,7 @@
                         <a:buNone/>
                       </a:pPr>
                       <a:r>
-                        <a:rPr lang="en-US" sz="1100" dirty="0">
+                        <a:rPr lang="en-US" sz="1000" dirty="0">
                           <a:solidFill>
                             <a:srgbClr val="000000"/>
                           </a:solidFill>
@@ -5130,9 +5153,9 @@
                           <a:ea typeface="Calibri" pitchFamily="34" charset="-122"/>
                           <a:cs typeface="Calibri" pitchFamily="34" charset="-120"/>
                         </a:rPr>
-                        <a:t>Loan growth −0.44pp/qtr  ·  No recovery through 10+ quarters</a:t>
+                        <a:t>Auto share −4.0pp  ·  RE share +2.4pp  ·  Shift is permanent, no recovery</a:t>
                       </a:r>
-                      <a:endParaRPr lang="en-US" sz="1100" dirty="0">
+                      <a:endParaRPr lang="en-US" sz="1000" dirty="0">
                         <a:latin typeface="Calibri" charset="0"/>
                         <a:ea typeface="Calibri" charset="0"/>
                         <a:cs typeface="Calibri" charset="0"/>
@@ -5187,7 +5210,7 @@
                   </a:ext>
                 </a:extLst>
               </a:tr>
-              <a:tr h="749808">
+              <a:tr h="658368">
                 <a:tc>
                   <a:txBody>
                     <a:bodyPr/>
@@ -5197,7 +5220,7 @@
                         <a:buNone/>
                       </a:pPr>
                       <a:r>
-                        <a:rPr lang="en-US" sz="1100" b="1" dirty="0">
+                        <a:rPr lang="en-US" sz="1000" b="1" dirty="0">
                           <a:solidFill>
                             <a:srgbClr val="1A2744"/>
                           </a:solidFill>
@@ -5205,9 +5228,9 @@
                           <a:ea typeface="Calibri" pitchFamily="34" charset="-122"/>
                           <a:cs typeface="Calibri" pitchFamily="34" charset="-120"/>
                         </a:rPr>
-                        <a:t>RQ 5</a:t>
+                        <a:t>RQ 4b</a:t>
                       </a:r>
-                      <a:endParaRPr lang="en-US" sz="1100" dirty="0">
+                      <a:endParaRPr lang="en-US" sz="1000" dirty="0">
                         <a:latin typeface="Calibri" charset="0"/>
                         <a:ea typeface="Calibri" charset="0"/>
                         <a:cs typeface="Calibri" charset="0"/>
@@ -5265,7 +5288,7 @@
                         <a:buNone/>
                       </a:pPr>
                       <a:r>
-                        <a:rPr lang="en-US" sz="1100" dirty="0">
+                        <a:rPr lang="en-US" sz="1000" dirty="0">
                           <a:solidFill>
                             <a:srgbClr val="000000"/>
                           </a:solidFill>
@@ -5273,9 +5296,9 @@
                           <a:ea typeface="Calibri" pitchFamily="34" charset="-122"/>
                           <a:cs typeface="Calibri" pitchFamily="34" charset="-120"/>
                         </a:rPr>
-                        <a:t>What are the financial stability implications?</a:t>
+                        <a:t>Did credit quality deteriorate?</a:t>
                       </a:r>
-                      <a:endParaRPr lang="en-US" sz="1100" dirty="0">
+                      <a:endParaRPr lang="en-US" sz="1000" dirty="0">
                         <a:latin typeface="Calibri" charset="0"/>
                         <a:ea typeface="Calibri" charset="0"/>
                         <a:cs typeface="Calibri" charset="0"/>
@@ -5333,7 +5356,7 @@
                         <a:buNone/>
                       </a:pPr>
                       <a:r>
-                        <a:rPr lang="en-US" sz="1100" dirty="0">
+                        <a:rPr lang="en-US" sz="1000" dirty="0">
                           <a:solidFill>
                             <a:srgbClr val="000000"/>
                           </a:solidFill>
@@ -5341,9 +5364,9 @@
                           <a:ea typeface="Calibri" pitchFamily="34" charset="-122"/>
                           <a:cs typeface="Calibri" pitchFamily="34" charset="-120"/>
                         </a:rPr>
-                        <a:t>Quantifiable but modest protection — the rule shields ~24 institutions; most capital was already building before the rule</a:t>
+                        <a:t>Yes — delinquency rose most where profitability fell hardest. Institutions under the greatest financial pressure reduced their capacity for loan screening and monitoring</a:t>
                       </a:r>
-                      <a:endParaRPr lang="en-US" sz="1100" dirty="0">
+                      <a:endParaRPr lang="en-US" sz="1000" dirty="0">
                         <a:latin typeface="Calibri" charset="0"/>
                         <a:ea typeface="Calibri" charset="0"/>
                         <a:cs typeface="Calibri" charset="0"/>
@@ -5401,7 +5424,7 @@
                         <a:buNone/>
                       </a:pPr>
                       <a:r>
-                        <a:rPr lang="en-US" sz="1100" dirty="0">
+                        <a:rPr lang="en-US" sz="1000" dirty="0">
                           <a:solidFill>
                             <a:srgbClr val="000000"/>
                           </a:solidFill>
@@ -5409,9 +5432,9 @@
                           <a:ea typeface="Calibri" pitchFamily="34" charset="-122"/>
                           <a:cs typeface="Calibri" pitchFamily="34" charset="-120"/>
                         </a:rPr>
-                        <a:t>+3.4pp failure risk without rule  ·  ~24 institutions  ·  $14B assets each</a:t>
+                        <a:t>Delinquency +8bp average  ·  2× effect for high-ROA-decline CUs  ·  Capacity channel confirmed</a:t>
                       </a:r>
-                      <a:endParaRPr lang="en-US" sz="1100" dirty="0">
+                      <a:endParaRPr lang="en-US" sz="1000" dirty="0">
                         <a:latin typeface="Calibri" charset="0"/>
                         <a:ea typeface="Calibri" charset="0"/>
                         <a:cs typeface="Calibri" charset="0"/>
@@ -5466,7 +5489,7 @@
                   </a:ext>
                 </a:extLst>
               </a:tr>
-              <a:tr h="749808">
+              <a:tr h="658368">
                 <a:tc>
                   <a:txBody>
                     <a:bodyPr/>
@@ -5476,7 +5499,7 @@
                         <a:buNone/>
                       </a:pPr>
                       <a:r>
-                        <a:rPr lang="en-US" sz="1100" b="1" dirty="0">
+                        <a:rPr lang="en-US" sz="1000" b="1" dirty="0">
                           <a:solidFill>
                             <a:srgbClr val="1A2744"/>
                           </a:solidFill>
@@ -5484,9 +5507,9 @@
                           <a:ea typeface="Calibri" pitchFamily="34" charset="-122"/>
                           <a:cs typeface="Calibri" pitchFamily="34" charset="-120"/>
                         </a:rPr>
-                        <a:t>RQ 6</a:t>
+                        <a:t>RQ 5</a:t>
                       </a:r>
-                      <a:endParaRPr lang="en-US" sz="1100" dirty="0">
+                      <a:endParaRPr lang="en-US" sz="1000" dirty="0">
                         <a:latin typeface="Calibri" charset="0"/>
                         <a:ea typeface="Calibri" charset="0"/>
                         <a:cs typeface="Calibri" charset="0"/>
@@ -5544,7 +5567,7 @@
                         <a:buNone/>
                       </a:pPr>
                       <a:r>
-                        <a:rPr lang="en-US" sz="1100" dirty="0">
+                        <a:rPr lang="en-US" sz="1000" dirty="0">
                           <a:solidFill>
                             <a:srgbClr val="000000"/>
                           </a:solidFill>
@@ -5552,9 +5575,9 @@
                           <a:ea typeface="Calibri" pitchFamily="34" charset="-122"/>
                           <a:cs typeface="Calibri" pitchFamily="34" charset="-120"/>
                         </a:rPr>
-                        <a:t>Did the CCULR relief provision work?</a:t>
+                        <a:t>What are the financial stability implications?</a:t>
                       </a:r>
-                      <a:endParaRPr lang="en-US" sz="1100" dirty="0">
+                      <a:endParaRPr lang="en-US" sz="1000" dirty="0">
                         <a:latin typeface="Calibri" charset="0"/>
                         <a:ea typeface="Calibri" charset="0"/>
                         <a:cs typeface="Calibri" charset="0"/>
@@ -5612,7 +5635,7 @@
                         <a:buNone/>
                       </a:pPr>
                       <a:r>
-                        <a:rPr lang="en-US" sz="1100" dirty="0">
+                        <a:rPr lang="en-US" sz="1000" dirty="0">
                           <a:solidFill>
                             <a:srgbClr val="000000"/>
                           </a:solidFill>
@@ -5620,9 +5643,9 @@
                           <a:ea typeface="Calibri" pitchFamily="34" charset="-122"/>
                           <a:cs typeface="Calibri" pitchFamily="34" charset="-120"/>
                         </a:rPr>
-                        <a:t>No — CCULR provided no measurable relief; adopters were already distressed; $400M–$1B institutions were hardest hit</a:t>
+                        <a:t>Real but modest protection. Without the rule, ~24 more institutions would fail a 2008-severity stress test. But the gap between pre-rule (19.1%) and with-rule (19.4%) is narrow — CUs were already building capital organically</a:t>
                       </a:r>
-                      <a:endParaRPr lang="en-US" sz="1100" dirty="0">
+                      <a:endParaRPr lang="en-US" sz="1000" dirty="0">
                         <a:latin typeface="Calibri" charset="0"/>
                         <a:ea typeface="Calibri" charset="0"/>
                         <a:cs typeface="Calibri" charset="0"/>
@@ -5680,7 +5703,7 @@
                         <a:buNone/>
                       </a:pPr>
                       <a:r>
-                        <a:rPr lang="en-US" sz="1100" dirty="0">
+                        <a:rPr lang="en-US" sz="1000" dirty="0">
                           <a:solidFill>
                             <a:srgbClr val="000000"/>
                           </a:solidFill>
@@ -5688,9 +5711,9 @@
                           <a:ea typeface="Calibri" pitchFamily="34" charset="-122"/>
                           <a:cs typeface="Calibri" pitchFamily="34" charset="-120"/>
                         </a:rPr>
-                        <a:t>No significant improvement in lending or profitability for CCULR adopters</a:t>
+                        <a:t>With rule: 19.4% fail  ·  Without rule: 22.5% fail  ·  Difference: 3.1pp  ·  ~24 institutions  ·  ~$14B assets each</a:t>
                       </a:r>
-                      <a:endParaRPr lang="en-US" sz="1100" dirty="0">
+                      <a:endParaRPr lang="en-US" sz="1000" dirty="0">
                         <a:latin typeface="Calibri" charset="0"/>
                         <a:ea typeface="Calibri" charset="0"/>
                         <a:cs typeface="Calibri" charset="0"/>
@@ -5745,6 +5768,285 @@
                   </a:ext>
                 </a:extLst>
               </a:tr>
+              <a:tr h="658368">
+                <a:tc>
+                  <a:txBody>
+                    <a:bodyPr/>
+                    <a:lstStyle/>
+                    <a:p>
+                      <a:pPr marL="0" indent="0" algn="ctr">
+                        <a:buNone/>
+                      </a:pPr>
+                      <a:r>
+                        <a:rPr lang="en-US" sz="1000" b="1" dirty="0">
+                          <a:solidFill>
+                            <a:srgbClr val="1A2744"/>
+                          </a:solidFill>
+                          <a:latin typeface="Calibri" pitchFamily="34" charset="0"/>
+                          <a:ea typeface="Calibri" pitchFamily="34" charset="-122"/>
+                          <a:cs typeface="Calibri" pitchFamily="34" charset="-120"/>
+                        </a:rPr>
+                        <a:t>RQ 6</a:t>
+                      </a:r>
+                      <a:endParaRPr lang="en-US" sz="1000" dirty="0">
+                        <a:latin typeface="Calibri" charset="0"/>
+                        <a:ea typeface="Calibri" charset="0"/>
+                        <a:cs typeface="Calibri" charset="0"/>
+                      </a:endParaRPr>
+                    </a:p>
+                  </a:txBody>
+                  <a:tcPr>
+                    <a:lnL w="6350" cap="flat" cmpd="sng" algn="ctr">
+                      <a:solidFill>
+                        <a:srgbClr val="DDDDDD"/>
+                      </a:solidFill>
+                      <a:prstDash val="solid"/>
+                      <a:round/>
+                      <a:headEnd type="none" w="med" len="med"/>
+                      <a:tailEnd type="none" w="med" len="med"/>
+                    </a:lnL>
+                    <a:lnR w="6350" cap="flat" cmpd="sng" algn="ctr">
+                      <a:solidFill>
+                        <a:srgbClr val="DDDDDD"/>
+                      </a:solidFill>
+                      <a:prstDash val="solid"/>
+                      <a:round/>
+                      <a:headEnd type="none" w="med" len="med"/>
+                      <a:tailEnd type="none" w="med" len="med"/>
+                    </a:lnR>
+                    <a:lnT w="6350" cap="flat" cmpd="sng" algn="ctr">
+                      <a:solidFill>
+                        <a:srgbClr val="DDDDDD"/>
+                      </a:solidFill>
+                      <a:prstDash val="solid"/>
+                      <a:round/>
+                      <a:headEnd type="none" w="med" len="med"/>
+                      <a:tailEnd type="none" w="med" len="med"/>
+                    </a:lnT>
+                    <a:lnB w="6350" cap="flat" cmpd="sng" algn="ctr">
+                      <a:solidFill>
+                        <a:srgbClr val="DDDDDD"/>
+                      </a:solidFill>
+                      <a:prstDash val="solid"/>
+                      <a:round/>
+                      <a:headEnd type="none" w="med" len="med"/>
+                      <a:tailEnd type="none" w="med" len="med"/>
+                    </a:lnB>
+                    <a:solidFill>
+                      <a:srgbClr val="FFFFFF"/>
+                    </a:solidFill>
+                  </a:tcPr>
+                </a:tc>
+                <a:tc>
+                  <a:txBody>
+                    <a:bodyPr/>
+                    <a:lstStyle/>
+                    <a:p>
+                      <a:pPr marL="0" indent="0">
+                        <a:buNone/>
+                      </a:pPr>
+                      <a:r>
+                        <a:rPr lang="en-US" sz="1000" dirty="0">
+                          <a:solidFill>
+                            <a:srgbClr val="000000"/>
+                          </a:solidFill>
+                          <a:latin typeface="Calibri" pitchFamily="34" charset="0"/>
+                          <a:ea typeface="Calibri" pitchFamily="34" charset="-122"/>
+                          <a:cs typeface="Calibri" pitchFamily="34" charset="-120"/>
+                        </a:rPr>
+                        <a:t>Did the CCULR relief provision work?</a:t>
+                      </a:r>
+                      <a:endParaRPr lang="en-US" sz="1000" dirty="0">
+                        <a:latin typeface="Calibri" charset="0"/>
+                        <a:ea typeface="Calibri" charset="0"/>
+                        <a:cs typeface="Calibri" charset="0"/>
+                      </a:endParaRPr>
+                    </a:p>
+                  </a:txBody>
+                  <a:tcPr>
+                    <a:lnL w="6350" cap="flat" cmpd="sng" algn="ctr">
+                      <a:solidFill>
+                        <a:srgbClr val="DDDDDD"/>
+                      </a:solidFill>
+                      <a:prstDash val="solid"/>
+                      <a:round/>
+                      <a:headEnd type="none" w="med" len="med"/>
+                      <a:tailEnd type="none" w="med" len="med"/>
+                    </a:lnL>
+                    <a:lnR w="6350" cap="flat" cmpd="sng" algn="ctr">
+                      <a:solidFill>
+                        <a:srgbClr val="DDDDDD"/>
+                      </a:solidFill>
+                      <a:prstDash val="solid"/>
+                      <a:round/>
+                      <a:headEnd type="none" w="med" len="med"/>
+                      <a:tailEnd type="none" w="med" len="med"/>
+                    </a:lnR>
+                    <a:lnT w="6350" cap="flat" cmpd="sng" algn="ctr">
+                      <a:solidFill>
+                        <a:srgbClr val="DDDDDD"/>
+                      </a:solidFill>
+                      <a:prstDash val="solid"/>
+                      <a:round/>
+                      <a:headEnd type="none" w="med" len="med"/>
+                      <a:tailEnd type="none" w="med" len="med"/>
+                    </a:lnT>
+                    <a:lnB w="6350" cap="flat" cmpd="sng" algn="ctr">
+                      <a:solidFill>
+                        <a:srgbClr val="DDDDDD"/>
+                      </a:solidFill>
+                      <a:prstDash val="solid"/>
+                      <a:round/>
+                      <a:headEnd type="none" w="med" len="med"/>
+                      <a:tailEnd type="none" w="med" len="med"/>
+                    </a:lnB>
+                    <a:solidFill>
+                      <a:srgbClr val="FFFFFF"/>
+                    </a:solidFill>
+                  </a:tcPr>
+                </a:tc>
+                <a:tc>
+                  <a:txBody>
+                    <a:bodyPr/>
+                    <a:lstStyle/>
+                    <a:p>
+                      <a:pPr marL="0" indent="0">
+                        <a:buNone/>
+                      </a:pPr>
+                      <a:r>
+                        <a:rPr lang="en-US" sz="1000" dirty="0">
+                          <a:solidFill>
+                            <a:srgbClr val="000000"/>
+                          </a:solidFill>
+                          <a:latin typeface="Calibri" pitchFamily="34" charset="0"/>
+                          <a:ea typeface="Calibri" pitchFamily="34" charset="-122"/>
+                          <a:cs typeface="Calibri" pitchFamily="34" charset="-120"/>
+                        </a:rPr>
+                        <a:t>No — CCULR provided no measurable relief on lending or profitability. Adopters were already financially distressed before adoption; the CCULR did not reverse their trajectory</a:t>
+                      </a:r>
+                      <a:endParaRPr lang="en-US" sz="1000" dirty="0">
+                        <a:latin typeface="Calibri" charset="0"/>
+                        <a:ea typeface="Calibri" charset="0"/>
+                        <a:cs typeface="Calibri" charset="0"/>
+                      </a:endParaRPr>
+                    </a:p>
+                  </a:txBody>
+                  <a:tcPr>
+                    <a:lnL w="6350" cap="flat" cmpd="sng" algn="ctr">
+                      <a:solidFill>
+                        <a:srgbClr val="DDDDDD"/>
+                      </a:solidFill>
+                      <a:prstDash val="solid"/>
+                      <a:round/>
+                      <a:headEnd type="none" w="med" len="med"/>
+                      <a:tailEnd type="none" w="med" len="med"/>
+                    </a:lnL>
+                    <a:lnR w="6350" cap="flat" cmpd="sng" algn="ctr">
+                      <a:solidFill>
+                        <a:srgbClr val="DDDDDD"/>
+                      </a:solidFill>
+                      <a:prstDash val="solid"/>
+                      <a:round/>
+                      <a:headEnd type="none" w="med" len="med"/>
+                      <a:tailEnd type="none" w="med" len="med"/>
+                    </a:lnR>
+                    <a:lnT w="6350" cap="flat" cmpd="sng" algn="ctr">
+                      <a:solidFill>
+                        <a:srgbClr val="DDDDDD"/>
+                      </a:solidFill>
+                      <a:prstDash val="solid"/>
+                      <a:round/>
+                      <a:headEnd type="none" w="med" len="med"/>
+                      <a:tailEnd type="none" w="med" len="med"/>
+                    </a:lnT>
+                    <a:lnB w="6350" cap="flat" cmpd="sng" algn="ctr">
+                      <a:solidFill>
+                        <a:srgbClr val="DDDDDD"/>
+                      </a:solidFill>
+                      <a:prstDash val="solid"/>
+                      <a:round/>
+                      <a:headEnd type="none" w="med" len="med"/>
+                      <a:tailEnd type="none" w="med" len="med"/>
+                    </a:lnB>
+                    <a:solidFill>
+                      <a:srgbClr val="FFFFFF"/>
+                    </a:solidFill>
+                  </a:tcPr>
+                </a:tc>
+                <a:tc>
+                  <a:txBody>
+                    <a:bodyPr/>
+                    <a:lstStyle/>
+                    <a:p>
+                      <a:pPr marL="0" indent="0">
+                        <a:buNone/>
+                      </a:pPr>
+                      <a:r>
+                        <a:rPr lang="en-US" sz="1000" dirty="0">
+                          <a:solidFill>
+                            <a:srgbClr val="000000"/>
+                          </a:solidFill>
+                          <a:latin typeface="Calibri" pitchFamily="34" charset="0"/>
+                          <a:ea typeface="Calibri" pitchFamily="34" charset="-122"/>
+                          <a:cs typeface="Calibri" pitchFamily="34" charset="-120"/>
+                        </a:rPr>
+                        <a:t>$400M–$1B institutions hardest hit  ·  No significant improvement in lending or ROA for CCULR adopters</a:t>
+                      </a:r>
+                      <a:endParaRPr lang="en-US" sz="1000" dirty="0">
+                        <a:latin typeface="Calibri" charset="0"/>
+                        <a:ea typeface="Calibri" charset="0"/>
+                        <a:cs typeface="Calibri" charset="0"/>
+                      </a:endParaRPr>
+                    </a:p>
+                  </a:txBody>
+                  <a:tcPr>
+                    <a:lnL w="6350" cap="flat" cmpd="sng" algn="ctr">
+                      <a:solidFill>
+                        <a:srgbClr val="DDDDDD"/>
+                      </a:solidFill>
+                      <a:prstDash val="solid"/>
+                      <a:round/>
+                      <a:headEnd type="none" w="med" len="med"/>
+                      <a:tailEnd type="none" w="med" len="med"/>
+                    </a:lnL>
+                    <a:lnR w="6350" cap="flat" cmpd="sng" algn="ctr">
+                      <a:solidFill>
+                        <a:srgbClr val="DDDDDD"/>
+                      </a:solidFill>
+                      <a:prstDash val="solid"/>
+                      <a:round/>
+                      <a:headEnd type="none" w="med" len="med"/>
+                      <a:tailEnd type="none" w="med" len="med"/>
+                    </a:lnR>
+                    <a:lnT w="6350" cap="flat" cmpd="sng" algn="ctr">
+                      <a:solidFill>
+                        <a:srgbClr val="DDDDDD"/>
+                      </a:solidFill>
+                      <a:prstDash val="solid"/>
+                      <a:round/>
+                      <a:headEnd type="none" w="med" len="med"/>
+                      <a:tailEnd type="none" w="med" len="med"/>
+                    </a:lnT>
+                    <a:lnB w="6350" cap="flat" cmpd="sng" algn="ctr">
+                      <a:solidFill>
+                        <a:srgbClr val="DDDDDD"/>
+                      </a:solidFill>
+                      <a:prstDash val="solid"/>
+                      <a:round/>
+                      <a:headEnd type="none" w="med" len="med"/>
+                      <a:tailEnd type="none" w="med" len="med"/>
+                    </a:lnB>
+                    <a:solidFill>
+                      <a:srgbClr val="FFFFFF"/>
+                    </a:solidFill>
+                  </a:tcPr>
+                </a:tc>
+                <a:extLst>
+                  <a:ext uri="{0D108BD9-81ED-4DB2-BD59-A6C34878D82A}">
+                    <a16:rowId xmlns:a16="http://schemas.microsoft.com/office/drawing/2014/main" val="10007"/>
+                  </a:ext>
+                </a:extLst>
+              </a:tr>
             </a:tbl>
           </a:graphicData>
         </a:graphic>
@@ -5757,8 +6059,8 @@
         </p:nvSpPr>
         <p:spPr>
           <a:xfrm>
-            <a:off x="1691640" y="5596128"/>
-            <a:ext cx="10195560" cy="749808"/>
+            <a:off x="1691640" y="6492240"/>
+            <a:ext cx="10195560" cy="566928"/>
           </a:xfrm>
           <a:prstGeom prst="rect">
             <a:avLst/>
@@ -5789,8 +6091,8 @@
         </p:nvSpPr>
         <p:spPr>
           <a:xfrm>
-            <a:off x="1691640" y="5596128"/>
-            <a:ext cx="82296" cy="749808"/>
+            <a:off x="1691640" y="6492240"/>
+            <a:ext cx="82296" cy="566928"/>
           </a:xfrm>
           <a:prstGeom prst="rect">
             <a:avLst/>
@@ -5821,8 +6123,8 @@
         </p:nvSpPr>
         <p:spPr>
           <a:xfrm>
-            <a:off x="1828800" y="5596128"/>
-            <a:ext cx="9966960" cy="749808"/>
+            <a:off x="1828800" y="6492240"/>
+            <a:ext cx="9966960" cy="566928"/>
           </a:xfrm>
           <a:prstGeom prst="rect">
             <a:avLst/>
@@ -5838,7 +6140,7 @@
               <a:buNone/>
             </a:pPr>
             <a:r>
-              <a:rPr lang="en-US" sz="1100" dirty="0">
+              <a:rPr lang="en-US" sz="1050" dirty="0">
                 <a:solidFill>
                   <a:srgbClr val="FFFFFF"/>
                 </a:solidFill>
@@ -5846,9 +6148,9 @@
                 <a:ea typeface="Calibri" pitchFamily="34" charset="-122"/>
                 <a:cs typeface="Calibri" pitchFamily="34" charset="-120"/>
               </a:rPr>
-              <a:t>Across all five research questions, the findings are consistent: complex credit unions responded to the rule’s capital incentive primarily through higher loan rates, reduced lending volume, portfolio reallocation, and lower profitability — rather than through material improvements in financial stability outcomes at the system level.</a:t>
-            </a:r>
-            <a:endParaRPr lang="en-US" sz="1100" dirty="0"/>
+              <a:t>The findings are consistent across all six questions: complex credit unions responded to the rule primarily through higher loan rates, reduced lending, portfolio reallocation, and lower profitability — with only modest and largely organic improvements in financial stability outcomes at the system level.</a:t>
+            </a:r>
+            <a:endParaRPr lang="en-US" sz="1050" dirty="0"/>
           </a:p>
         </p:txBody>
       </p:sp>
@@ -13105,7 +13407,7 @@
         </p:nvSpPr>
         <p:spPr>
           <a:xfrm>
-            <a:off x="1773936" y="1568196"/>
+            <a:off x="1783080" y="1691640"/>
             <a:ext cx="9829800" cy="960120"/>
           </a:xfrm>
           <a:prstGeom prst="rect">
@@ -13536,8 +13838,8 @@
         </p:nvSpPr>
         <p:spPr>
           <a:xfrm>
-            <a:off x="1691640" y="5413248"/>
-            <a:ext cx="5029200" cy="1234440"/>
+            <a:off x="1691640" y="4892040"/>
+            <a:ext cx="5029200" cy="1755648"/>
           </a:xfrm>
           <a:prstGeom prst="rect">
             <a:avLst/>
@@ -15493,7 +15795,7 @@
                 <a:ea typeface="Calibri" pitchFamily="34" charset="-122"/>
                 <a:cs typeface="Calibri" pitchFamily="34" charset="-120"/>
               </a:rPr>
-              <a:t>Answer: Yes. Delinquency rates rose +8bp on average — but the effect was concentrated in CUs hit hardest by profitability declines, revealing a capacity channel: squeezed institutions reduced screening and monitoring.</a:t>
+              <a:t>Answer: Yes — but unevenly. Delinquency rose most where profitability fell hardest. Institutions under the greatest financial pressure reduced their capacity for loan screening and monitoring, and credit quality deteriorated as a result.</a:t>
             </a:r>
             <a:endParaRPr lang="en-US" sz="1250" dirty="0"/>
           </a:p>
@@ -16883,7 +17185,7 @@
                 <a:ea typeface="Calibri" pitchFamily="34" charset="-122"/>
                 <a:cs typeface="Calibri" pitchFamily="34" charset="-120"/>
               </a:rPr>
-              <a:t>Supporting Finding — Profitability</a:t>
+              <a:t>Supporting Finding — Profitability Declined Persistently</a:t>
             </a:r>
             <a:endParaRPr lang="en-US" sz="2200" dirty="0"/>
           </a:p>
@@ -16954,7 +17256,7 @@
                 <a:ea typeface="Calibri" pitchFamily="34" charset="-122"/>
                 <a:cs typeface="Calibri" pitchFamily="34" charset="-120"/>
               </a:rPr>
-              <a:t>Profitability Declined Persistently — Largest Institutions Hit Hardest</a:t>
+              <a:t>Return on assets fell across all complex CUs — with the largest institutions hit hardest</a:t>
             </a:r>
             <a:endParaRPr lang="en-US" sz="1200" dirty="0"/>
           </a:p>
@@ -17135,7 +17437,7 @@
                 <a:ea typeface="Calibri" pitchFamily="34" charset="-122"/>
                 <a:cs typeface="Calibri" pitchFamily="34" charset="-120"/>
               </a:rPr>
-              <a:t>Return on assets fell across complex CUs — with the largest institutions experiencing the sharpest declines. This directly informs the financial stability question in RQ5.</a:t>
+              <a:t>ROA fell persistently across all complex CUs and has not recovered. The largest institutions were hit hardest — and lower profitability directly undermines the capital-building that the rule was designed to achieve.</a:t>
             </a:r>
             <a:endParaRPr lang="en-US" sz="1250" dirty="0"/>
           </a:p>
@@ -17150,7 +17452,7 @@
         <p:spPr>
           <a:xfrm>
             <a:off x="1691640" y="2331720"/>
-            <a:ext cx="3291840" cy="1005840"/>
+            <a:ext cx="3154680" cy="914400"/>
           </a:xfrm>
           <a:prstGeom prst="rect">
             <a:avLst/>
@@ -17189,7 +17491,7 @@
         <p:spPr>
           <a:xfrm>
             <a:off x="1783080" y="2404872"/>
-            <a:ext cx="3108960" cy="523037"/>
+            <a:ext cx="2971800" cy="475488"/>
           </a:xfrm>
           <a:prstGeom prst="rect">
             <a:avLst/>
@@ -17227,8 +17529,8 @@
         </p:nvSpPr>
         <p:spPr>
           <a:xfrm>
-            <a:off x="1783080" y="2884932"/>
-            <a:ext cx="3108960" cy="402336"/>
+            <a:off x="1783080" y="2834640"/>
+            <a:ext cx="2971800" cy="365760"/>
           </a:xfrm>
           <a:prstGeom prst="rect">
             <a:avLst/>
@@ -17252,7 +17554,7 @@
                 <a:ea typeface="Calibri" pitchFamily="34" charset="-122"/>
                 <a:cs typeface="Calibri" pitchFamily="34" charset="-120"/>
               </a:rPr>
-              <a:t>Average ROA decline</a:t>
+              <a:t>ROA decline</a:t>
             </a:r>
             <a:endParaRPr lang="en-US" sz="1000" dirty="0"/>
           </a:p>
@@ -17269,7 +17571,7 @@
                 <a:ea typeface="Calibri" pitchFamily="34" charset="-122"/>
                 <a:cs typeface="Calibri" pitchFamily="34" charset="-120"/>
               </a:rPr>
-              <a:t>all complex CUs (p &lt; 0.01)</a:t>
+              <a:t>all complex CUs (p &lt; 0.01)</a:t>
             </a:r>
             <a:endParaRPr lang="en-US" sz="1000" dirty="0"/>
           </a:p>
@@ -17283,8 +17585,8 @@
         </p:nvSpPr>
         <p:spPr>
           <a:xfrm>
-            <a:off x="5074920" y="2029968"/>
-            <a:ext cx="3291840" cy="1005840"/>
+            <a:off x="4937760" y="2331720"/>
+            <a:ext cx="3154680" cy="914400"/>
           </a:xfrm>
           <a:prstGeom prst="rect">
             <a:avLst/>
@@ -17322,8 +17624,8 @@
         </p:nvSpPr>
         <p:spPr>
           <a:xfrm>
-            <a:off x="5166360" y="2103120"/>
-            <a:ext cx="3108960" cy="523037"/>
+            <a:off x="5029200" y="2404872"/>
+            <a:ext cx="2971800" cy="475488"/>
           </a:xfrm>
           <a:prstGeom prst="rect">
             <a:avLst/>
@@ -17361,8 +17663,8 @@
         </p:nvSpPr>
         <p:spPr>
           <a:xfrm>
-            <a:off x="5166360" y="2583180"/>
-            <a:ext cx="3108960" cy="402336"/>
+            <a:off x="5029200" y="2834640"/>
+            <a:ext cx="2971800" cy="365760"/>
           </a:xfrm>
           <a:prstGeom prst="rect">
             <a:avLst/>
@@ -17386,7 +17688,7 @@
                 <a:ea typeface="Calibri" pitchFamily="34" charset="-122"/>
                 <a:cs typeface="Calibri" pitchFamily="34" charset="-120"/>
               </a:rPr>
-              <a:t>ROA decline for CUs</a:t>
+              <a:t>ROA decline</a:t>
             </a:r>
             <a:endParaRPr lang="en-US" sz="1000" dirty="0"/>
           </a:p>
@@ -17403,7 +17705,7 @@
                 <a:ea typeface="Calibri" pitchFamily="34" charset="-122"/>
                 <a:cs typeface="Calibri" pitchFamily="34" charset="-120"/>
               </a:rPr>
-              <a:t>above $10B in assets</a:t>
+              <a:t>CUs above $10B assets</a:t>
             </a:r>
             <a:endParaRPr lang="en-US" sz="1000" dirty="0"/>
           </a:p>
@@ -17411,14 +17713,720 @@
       </p:sp>
       <p:sp>
         <p:nvSpPr>
-          <p:cNvPr id="18" name="Shape 16"/>
-          <p:cNvSpPr/>
-          <p:nvPr/>
-        </p:nvSpPr>
-        <p:spPr>
-          <a:xfrm>
-            <a:off x="8458200" y="2331720"/>
-            <a:ext cx="3520440" cy="3474720"/>
+          <p:cNvPr id="18" name="Text 16"/>
+          <p:cNvSpPr/>
+          <p:nvPr/>
+        </p:nvSpPr>
+        <p:spPr>
+          <a:xfrm>
+            <a:off x="1691640" y="3364992"/>
+            <a:ext cx="4572000" cy="201168"/>
+          </a:xfrm>
+          <a:prstGeom prst="rect">
+            <a:avLst/>
+          </a:prstGeom>
+          <a:noFill/>
+          <a:ln/>
+        </p:spPr>
+        <p:txBody>
+          <a:bodyPr wrap="square" rtlCol="0" anchor="ctr"/>
+          <a:lstStyle/>
+          <a:p>
+            <a:pPr marL="0" indent="0">
+              <a:buNone/>
+            </a:pPr>
+            <a:r>
+              <a:rPr lang="en-US" sz="900" b="1" kern="0" spc="150" dirty="0">
+                <a:solidFill>
+                  <a:srgbClr val="C89728"/>
+                </a:solidFill>
+                <a:latin typeface="Calibri" pitchFamily="34" charset="0"/>
+                <a:ea typeface="Calibri" pitchFamily="34" charset="-122"/>
+                <a:cs typeface="Calibri" pitchFamily="34" charset="-120"/>
+              </a:rPr>
+              <a:t>KEY POINTS</a:t>
+            </a:r>
+            <a:endParaRPr lang="en-US" sz="900" dirty="0"/>
+          </a:p>
+        </p:txBody>
+      </p:sp>
+      <p:sp>
+        <p:nvSpPr>
+          <p:cNvPr id="19" name="Text 17"/>
+          <p:cNvSpPr/>
+          <p:nvPr/>
+        </p:nvSpPr>
+        <p:spPr>
+          <a:xfrm>
+            <a:off x="1691640" y="3566160"/>
+            <a:ext cx="5029200" cy="1234440"/>
+          </a:xfrm>
+          <a:prstGeom prst="rect">
+            <a:avLst/>
+          </a:prstGeom>
+          <a:noFill/>
+          <a:ln/>
+        </p:spPr>
+        <p:txBody>
+          <a:bodyPr wrap="square" rtlCol="0" anchor="t"/>
+          <a:lstStyle/>
+          <a:p>
+            <a:pPr marL="342900" indent="-342900">
+              <a:spcAft>
+                <a:spcPts val="300"/>
+              </a:spcAft>
+              <a:buSzPct val="100000"/>
+              <a:buChar char="•"/>
+            </a:pPr>
+            <a:r>
+              <a:rPr lang="en-US" sz="1150" dirty="0">
+                <a:solidFill>
+                  <a:srgbClr val="1C1C1C"/>
+                </a:solidFill>
+                <a:latin typeface="Calibri" pitchFamily="34" charset="0"/>
+                <a:ea typeface="Calibri" pitchFamily="34" charset="-122"/>
+                <a:cs typeface="Calibri" pitchFamily="34" charset="-120"/>
+              </a:rPr>
+              <a:t>The ROA decline is persistent — no sign of adaptation or recovery through the full observation window. This is not a transitional cost</a:t>
+            </a:r>
+            <a:endParaRPr lang="en-US" sz="1150" dirty="0"/>
+          </a:p>
+          <a:p>
+            <a:pPr marL="342900" indent="-342900">
+              <a:spcAft>
+                <a:spcPts val="300"/>
+              </a:spcAft>
+              <a:buSzPct val="100000"/>
+              <a:buChar char="•"/>
+            </a:pPr>
+            <a:r>
+              <a:rPr lang="en-US" sz="1150" dirty="0">
+                <a:solidFill>
+                  <a:srgbClr val="1C1C1C"/>
+                </a:solidFill>
+                <a:latin typeface="Calibri" pitchFamily="34" charset="0"/>
+                <a:ea typeface="Calibri" pitchFamily="34" charset="-122"/>
+                <a:cs typeface="Calibri" pitchFamily="34" charset="-120"/>
+              </a:rPr>
+              <a:t>The effect scales with size: institutions above $10B experienced a decline nearly double the average, suggesting larger CUs faced proportionally greater compliance pressure</a:t>
+            </a:r>
+            <a:endParaRPr lang="en-US" sz="1150" dirty="0"/>
+          </a:p>
+          <a:p>
+            <a:pPr marL="342900" indent="-342900">
+              <a:spcAft>
+                <a:spcPts val="300"/>
+              </a:spcAft>
+              <a:buSzPct val="100000"/>
+              <a:buChar char="•"/>
+            </a:pPr>
+            <a:r>
+              <a:rPr lang="en-US" sz="1150" dirty="0">
+                <a:solidFill>
+                  <a:srgbClr val="1C1C1C"/>
+                </a:solidFill>
+                <a:latin typeface="Calibri" pitchFamily="34" charset="0"/>
+                <a:ea typeface="Calibri" pitchFamily="34" charset="-122"/>
+                <a:cs typeface="Calibri" pitchFamily="34" charset="-120"/>
+              </a:rPr>
+              <a:t>Lower profitability directly undermines the rule’s own goal — a CU that cannot retain earnings must raise rates, reduce lending, or draw down its capital buffer. All three patterns appear in the data</a:t>
+            </a:r>
+            <a:endParaRPr lang="en-US" sz="1150" dirty="0"/>
+          </a:p>
+        </p:txBody>
+      </p:sp>
+      <p:sp>
+        <p:nvSpPr>
+          <p:cNvPr id="20" name="Shape 18"/>
+          <p:cNvSpPr/>
+          <p:nvPr/>
+        </p:nvSpPr>
+        <p:spPr>
+          <a:xfrm>
+            <a:off x="1691640" y="4892040"/>
+            <a:ext cx="5029200" cy="749808"/>
+          </a:xfrm>
+          <a:prstGeom prst="rect">
+            <a:avLst/>
+          </a:prstGeom>
+          <a:solidFill>
+            <a:srgbClr val="EDE8DF"/>
+          </a:solidFill>
+          <a:ln w="12700">
+            <a:solidFill>
+              <a:srgbClr val="C8C0B0"/>
+            </a:solidFill>
+            <a:prstDash val="solid"/>
+          </a:ln>
+        </p:spPr>
+        <p:txBody>
+          <a:bodyPr/>
+          <a:lstStyle/>
+          <a:p>
+            <a:endParaRPr lang="en-US"/>
+          </a:p>
+        </p:txBody>
+      </p:sp>
+      <p:sp>
+        <p:nvSpPr>
+          <p:cNvPr id="21" name="Shape 19"/>
+          <p:cNvSpPr/>
+          <p:nvPr/>
+        </p:nvSpPr>
+        <p:spPr>
+          <a:xfrm>
+            <a:off x="1691640" y="4892040"/>
+            <a:ext cx="64008" cy="749808"/>
+          </a:xfrm>
+          <a:prstGeom prst="rect">
+            <a:avLst/>
+          </a:prstGeom>
+          <a:solidFill>
+            <a:srgbClr val="C89728"/>
+          </a:solidFill>
+          <a:ln w="12700">
+            <a:solidFill>
+              <a:srgbClr val="C89728"/>
+            </a:solidFill>
+            <a:prstDash val="solid"/>
+          </a:ln>
+        </p:spPr>
+        <p:txBody>
+          <a:bodyPr/>
+          <a:lstStyle/>
+          <a:p>
+            <a:endParaRPr lang="en-US"/>
+          </a:p>
+        </p:txBody>
+      </p:sp>
+      <p:sp>
+        <p:nvSpPr>
+          <p:cNvPr id="22" name="Text 20"/>
+          <p:cNvSpPr/>
+          <p:nvPr/>
+        </p:nvSpPr>
+        <p:spPr>
+          <a:xfrm>
+            <a:off x="1828800" y="4937760"/>
+            <a:ext cx="4828032" cy="658368"/>
+          </a:xfrm>
+          <a:prstGeom prst="rect">
+            <a:avLst/>
+          </a:prstGeom>
+          <a:noFill/>
+          <a:ln/>
+        </p:spPr>
+        <p:txBody>
+          <a:bodyPr wrap="square" rtlCol="0" anchor="t"/>
+          <a:lstStyle/>
+          <a:p>
+            <a:pPr marL="0" indent="0">
+              <a:buNone/>
+            </a:pPr>
+            <a:r>
+              <a:rPr lang="en-US" sz="1050" dirty="0">
+                <a:solidFill>
+                  <a:srgbClr val="444444"/>
+                </a:solidFill>
+                <a:latin typeface="Calibri" pitchFamily="34" charset="0"/>
+                <a:ea typeface="Calibri" pitchFamily="34" charset="-122"/>
+                <a:cs typeface="Calibri" pitchFamily="34" charset="-120"/>
+              </a:rPr>
+              <a:t>The link to RQ5: Profitability is the primary engine of organic capital accumulation. A rule that persistently depresses ROA slows the very capital-building it is designed to require — creating a self-defeating dynamic for the most exposed institutions.</a:t>
+            </a:r>
+            <a:endParaRPr lang="en-US" sz="1050" dirty="0"/>
+          </a:p>
+        </p:txBody>
+      </p:sp>
+      <p:sp>
+        <p:nvSpPr>
+          <p:cNvPr id="23" name="Text 21"/>
+          <p:cNvSpPr/>
+          <p:nvPr/>
+        </p:nvSpPr>
+        <p:spPr>
+          <a:xfrm>
+            <a:off x="1691640" y="5742432"/>
+            <a:ext cx="4572000" cy="201168"/>
+          </a:xfrm>
+          <a:prstGeom prst="rect">
+            <a:avLst/>
+          </a:prstGeom>
+          <a:noFill/>
+          <a:ln/>
+        </p:spPr>
+        <p:txBody>
+          <a:bodyPr wrap="square" rtlCol="0" anchor="ctr"/>
+          <a:lstStyle/>
+          <a:p>
+            <a:pPr marL="0" indent="0">
+              <a:buNone/>
+            </a:pPr>
+            <a:r>
+              <a:rPr lang="en-US" sz="900" b="1" kern="0" spc="150" dirty="0">
+                <a:solidFill>
+                  <a:srgbClr val="C89728"/>
+                </a:solidFill>
+                <a:latin typeface="Calibri" pitchFamily="34" charset="0"/>
+                <a:ea typeface="Calibri" pitchFamily="34" charset="-122"/>
+                <a:cs typeface="Calibri" pitchFamily="34" charset="-120"/>
+              </a:rPr>
+              <a:t>ROA DECLINE BY INSTITUTION SIZE</a:t>
+            </a:r>
+            <a:endParaRPr lang="en-US" sz="900" dirty="0"/>
+          </a:p>
+        </p:txBody>
+      </p:sp>
+      <p:sp>
+        <p:nvSpPr>
+          <p:cNvPr id="24" name="Shape 22"/>
+          <p:cNvSpPr/>
+          <p:nvPr/>
+        </p:nvSpPr>
+        <p:spPr>
+          <a:xfrm>
+            <a:off x="1691640" y="5961888"/>
+            <a:ext cx="1508760" cy="621792"/>
+          </a:xfrm>
+          <a:prstGeom prst="rect">
+            <a:avLst/>
+          </a:prstGeom>
+          <a:solidFill>
+            <a:srgbClr val="1A2744"/>
+          </a:solidFill>
+          <a:ln w="12700">
+            <a:solidFill>
+              <a:srgbClr val="1A2744"/>
+            </a:solidFill>
+            <a:prstDash val="solid"/>
+          </a:ln>
+        </p:spPr>
+        <p:txBody>
+          <a:bodyPr/>
+          <a:lstStyle/>
+          <a:p>
+            <a:endParaRPr lang="en-US"/>
+          </a:p>
+        </p:txBody>
+      </p:sp>
+      <p:sp>
+        <p:nvSpPr>
+          <p:cNvPr id="25" name="Text 23"/>
+          <p:cNvSpPr/>
+          <p:nvPr/>
+        </p:nvSpPr>
+        <p:spPr>
+          <a:xfrm>
+            <a:off x="1691640" y="5961888"/>
+            <a:ext cx="1508760" cy="347472"/>
+          </a:xfrm>
+          <a:prstGeom prst="rect">
+            <a:avLst/>
+          </a:prstGeom>
+          <a:noFill/>
+          <a:ln/>
+        </p:spPr>
+        <p:txBody>
+          <a:bodyPr wrap="square" rtlCol="0" anchor="ctr"/>
+          <a:lstStyle/>
+          <a:p>
+            <a:pPr marL="0" indent="0" algn="ctr">
+              <a:buNone/>
+            </a:pPr>
+            <a:r>
+              <a:rPr lang="en-US" sz="1600" b="1" dirty="0">
+                <a:solidFill>
+                  <a:srgbClr val="F4A5A8"/>
+                </a:solidFill>
+                <a:latin typeface="Calibri" pitchFamily="34" charset="0"/>
+                <a:ea typeface="Calibri" pitchFamily="34" charset="-122"/>
+                <a:cs typeface="Calibri" pitchFamily="34" charset="-120"/>
+              </a:rPr>
+              <a:t>−18bp</a:t>
+            </a:r>
+            <a:endParaRPr lang="en-US" sz="1600" dirty="0"/>
+          </a:p>
+        </p:txBody>
+      </p:sp>
+      <p:sp>
+        <p:nvSpPr>
+          <p:cNvPr id="26" name="Text 24"/>
+          <p:cNvSpPr/>
+          <p:nvPr/>
+        </p:nvSpPr>
+        <p:spPr>
+          <a:xfrm>
+            <a:off x="1691640" y="6291072"/>
+            <a:ext cx="1508760" cy="256032"/>
+          </a:xfrm>
+          <a:prstGeom prst="rect">
+            <a:avLst/>
+          </a:prstGeom>
+          <a:noFill/>
+          <a:ln/>
+        </p:spPr>
+        <p:txBody>
+          <a:bodyPr wrap="square" rtlCol="0" anchor="ctr"/>
+          <a:lstStyle/>
+          <a:p>
+            <a:pPr marL="0" indent="0" algn="ctr">
+              <a:buNone/>
+            </a:pPr>
+            <a:r>
+              <a:rPr lang="en-US" sz="850" dirty="0">
+                <a:solidFill>
+                  <a:srgbClr val="B8C4D8"/>
+                </a:solidFill>
+                <a:latin typeface="Calibri" pitchFamily="34" charset="0"/>
+                <a:ea typeface="Calibri" pitchFamily="34" charset="-122"/>
+                <a:cs typeface="Calibri" pitchFamily="34" charset="-120"/>
+              </a:rPr>
+              <a:t>$500M–$1B</a:t>
+            </a:r>
+            <a:endParaRPr lang="en-US" sz="850" dirty="0"/>
+          </a:p>
+        </p:txBody>
+      </p:sp>
+      <p:sp>
+        <p:nvSpPr>
+          <p:cNvPr id="27" name="Shape 25"/>
+          <p:cNvSpPr/>
+          <p:nvPr/>
+        </p:nvSpPr>
+        <p:spPr>
+          <a:xfrm>
+            <a:off x="3337560" y="5961888"/>
+            <a:ext cx="1508760" cy="621792"/>
+          </a:xfrm>
+          <a:prstGeom prst="rect">
+            <a:avLst/>
+          </a:prstGeom>
+          <a:solidFill>
+            <a:srgbClr val="1A2744"/>
+          </a:solidFill>
+          <a:ln w="12700">
+            <a:solidFill>
+              <a:srgbClr val="1A2744"/>
+            </a:solidFill>
+            <a:prstDash val="solid"/>
+          </a:ln>
+        </p:spPr>
+        <p:txBody>
+          <a:bodyPr/>
+          <a:lstStyle/>
+          <a:p>
+            <a:endParaRPr lang="en-US"/>
+          </a:p>
+        </p:txBody>
+      </p:sp>
+      <p:sp>
+        <p:nvSpPr>
+          <p:cNvPr id="28" name="Text 26"/>
+          <p:cNvSpPr/>
+          <p:nvPr/>
+        </p:nvSpPr>
+        <p:spPr>
+          <a:xfrm>
+            <a:off x="3337560" y="5961888"/>
+            <a:ext cx="1508760" cy="347472"/>
+          </a:xfrm>
+          <a:prstGeom prst="rect">
+            <a:avLst/>
+          </a:prstGeom>
+          <a:noFill/>
+          <a:ln/>
+        </p:spPr>
+        <p:txBody>
+          <a:bodyPr wrap="square" rtlCol="0" anchor="ctr"/>
+          <a:lstStyle/>
+          <a:p>
+            <a:pPr marL="0" indent="0" algn="ctr">
+              <a:buNone/>
+            </a:pPr>
+            <a:r>
+              <a:rPr lang="en-US" sz="1600" b="1" dirty="0">
+                <a:solidFill>
+                  <a:srgbClr val="F4A5A8"/>
+                </a:solidFill>
+                <a:latin typeface="Calibri" pitchFamily="34" charset="0"/>
+                <a:ea typeface="Calibri" pitchFamily="34" charset="-122"/>
+                <a:cs typeface="Calibri" pitchFamily="34" charset="-120"/>
+              </a:rPr>
+              <a:t>−26bp</a:t>
+            </a:r>
+            <a:endParaRPr lang="en-US" sz="1600" dirty="0"/>
+          </a:p>
+        </p:txBody>
+      </p:sp>
+      <p:sp>
+        <p:nvSpPr>
+          <p:cNvPr id="29" name="Text 27"/>
+          <p:cNvSpPr/>
+          <p:nvPr/>
+        </p:nvSpPr>
+        <p:spPr>
+          <a:xfrm>
+            <a:off x="3337560" y="6291072"/>
+            <a:ext cx="1508760" cy="256032"/>
+          </a:xfrm>
+          <a:prstGeom prst="rect">
+            <a:avLst/>
+          </a:prstGeom>
+          <a:noFill/>
+          <a:ln/>
+        </p:spPr>
+        <p:txBody>
+          <a:bodyPr wrap="square" rtlCol="0" anchor="ctr"/>
+          <a:lstStyle/>
+          <a:p>
+            <a:pPr marL="0" indent="0" algn="ctr">
+              <a:buNone/>
+            </a:pPr>
+            <a:r>
+              <a:rPr lang="en-US" sz="850" dirty="0">
+                <a:solidFill>
+                  <a:srgbClr val="B8C4D8"/>
+                </a:solidFill>
+                <a:latin typeface="Calibri" pitchFamily="34" charset="0"/>
+                <a:ea typeface="Calibri" pitchFamily="34" charset="-122"/>
+                <a:cs typeface="Calibri" pitchFamily="34" charset="-120"/>
+              </a:rPr>
+              <a:t>$1B–$10B</a:t>
+            </a:r>
+            <a:endParaRPr lang="en-US" sz="850" dirty="0"/>
+          </a:p>
+        </p:txBody>
+      </p:sp>
+      <p:sp>
+        <p:nvSpPr>
+          <p:cNvPr id="30" name="Shape 28"/>
+          <p:cNvSpPr/>
+          <p:nvPr/>
+        </p:nvSpPr>
+        <p:spPr>
+          <a:xfrm>
+            <a:off x="4983480" y="5961888"/>
+            <a:ext cx="1508760" cy="621792"/>
+          </a:xfrm>
+          <a:prstGeom prst="rect">
+            <a:avLst/>
+          </a:prstGeom>
+          <a:solidFill>
+            <a:srgbClr val="9B2226"/>
+          </a:solidFill>
+          <a:ln w="12700">
+            <a:solidFill>
+              <a:srgbClr val="9B2226"/>
+            </a:solidFill>
+            <a:prstDash val="solid"/>
+          </a:ln>
+        </p:spPr>
+        <p:txBody>
+          <a:bodyPr/>
+          <a:lstStyle/>
+          <a:p>
+            <a:endParaRPr lang="en-US"/>
+          </a:p>
+        </p:txBody>
+      </p:sp>
+      <p:sp>
+        <p:nvSpPr>
+          <p:cNvPr id="31" name="Text 29"/>
+          <p:cNvSpPr/>
+          <p:nvPr/>
+        </p:nvSpPr>
+        <p:spPr>
+          <a:xfrm>
+            <a:off x="4983480" y="5961888"/>
+            <a:ext cx="1508760" cy="347472"/>
+          </a:xfrm>
+          <a:prstGeom prst="rect">
+            <a:avLst/>
+          </a:prstGeom>
+          <a:noFill/>
+          <a:ln/>
+        </p:spPr>
+        <p:txBody>
+          <a:bodyPr wrap="square" rtlCol="0" anchor="ctr"/>
+          <a:lstStyle/>
+          <a:p>
+            <a:pPr marL="0" indent="0" algn="ctr">
+              <a:buNone/>
+            </a:pPr>
+            <a:r>
+              <a:rPr lang="en-US" sz="1600" b="1" dirty="0">
+                <a:solidFill>
+                  <a:srgbClr val="F4A5A8"/>
+                </a:solidFill>
+                <a:latin typeface="Calibri" pitchFamily="34" charset="0"/>
+                <a:ea typeface="Calibri" pitchFamily="34" charset="-122"/>
+                <a:cs typeface="Calibri" pitchFamily="34" charset="-120"/>
+              </a:rPr>
+              <a:t>−47bp</a:t>
+            </a:r>
+            <a:endParaRPr lang="en-US" sz="1600" dirty="0"/>
+          </a:p>
+        </p:txBody>
+      </p:sp>
+      <p:sp>
+        <p:nvSpPr>
+          <p:cNvPr id="32" name="Text 30"/>
+          <p:cNvSpPr/>
+          <p:nvPr/>
+        </p:nvSpPr>
+        <p:spPr>
+          <a:xfrm>
+            <a:off x="4983480" y="6291072"/>
+            <a:ext cx="1508760" cy="256032"/>
+          </a:xfrm>
+          <a:prstGeom prst="rect">
+            <a:avLst/>
+          </a:prstGeom>
+          <a:noFill/>
+          <a:ln/>
+        </p:spPr>
+        <p:txBody>
+          <a:bodyPr wrap="square" rtlCol="0" anchor="ctr"/>
+          <a:lstStyle/>
+          <a:p>
+            <a:pPr marL="0" indent="0" algn="ctr">
+              <a:buNone/>
+            </a:pPr>
+            <a:r>
+              <a:rPr lang="en-US" sz="850" dirty="0">
+                <a:solidFill>
+                  <a:srgbClr val="B8C4D8"/>
+                </a:solidFill>
+                <a:latin typeface="Calibri" pitchFamily="34" charset="0"/>
+                <a:ea typeface="Calibri" pitchFamily="34" charset="-122"/>
+                <a:cs typeface="Calibri" pitchFamily="34" charset="-120"/>
+              </a:rPr>
+              <a:t>Above $10B</a:t>
+            </a:r>
+            <a:endParaRPr lang="en-US" sz="850" dirty="0"/>
+          </a:p>
+        </p:txBody>
+      </p:sp>
+      <p:sp>
+        <p:nvSpPr>
+          <p:cNvPr id="33" name="Text 31"/>
+          <p:cNvSpPr/>
+          <p:nvPr/>
+        </p:nvSpPr>
+        <p:spPr>
+          <a:xfrm>
+            <a:off x="1691640" y="6601968"/>
+            <a:ext cx="5029200" cy="201168"/>
+          </a:xfrm>
+          <a:prstGeom prst="rect">
+            <a:avLst/>
+          </a:prstGeom>
+          <a:noFill/>
+          <a:ln/>
+        </p:spPr>
+        <p:txBody>
+          <a:bodyPr wrap="square" rtlCol="0" anchor="ctr"/>
+          <a:lstStyle/>
+          <a:p>
+            <a:pPr marL="0" indent="0">
+              <a:buNone/>
+            </a:pPr>
+            <a:r>
+              <a:rPr lang="en-US" sz="850" i="1" dirty="0">
+                <a:solidFill>
+                  <a:srgbClr val="5A5A5A"/>
+                </a:solidFill>
+                <a:latin typeface="Calibri" pitchFamily="34" charset="0"/>
+                <a:ea typeface="Calibri" pitchFamily="34" charset="-122"/>
+                <a:cs typeface="Calibri" pitchFamily="34" charset="-120"/>
+              </a:rPr>
+              <a:t>Larger institutions absorbed proportionally more of the rule’s cost</a:t>
+            </a:r>
+            <a:endParaRPr lang="en-US" sz="850" dirty="0"/>
+          </a:p>
+        </p:txBody>
+      </p:sp>
+      <p:sp>
+        <p:nvSpPr>
+          <p:cNvPr id="34" name="Shape 32"/>
+          <p:cNvSpPr/>
+          <p:nvPr/>
+        </p:nvSpPr>
+        <p:spPr>
+          <a:xfrm>
+            <a:off x="6766560" y="2331720"/>
+            <a:ext cx="36576" cy="4572000"/>
+          </a:xfrm>
+          <a:prstGeom prst="rect">
+            <a:avLst/>
+          </a:prstGeom>
+          <a:solidFill>
+            <a:srgbClr val="C8C0B0"/>
+          </a:solidFill>
+          <a:ln w="12700">
+            <a:solidFill>
+              <a:srgbClr val="C8C0B0"/>
+            </a:solidFill>
+            <a:prstDash val="solid"/>
+          </a:ln>
+        </p:spPr>
+        <p:txBody>
+          <a:bodyPr/>
+          <a:lstStyle/>
+          <a:p>
+            <a:endParaRPr lang="en-US"/>
+          </a:p>
+        </p:txBody>
+      </p:sp>
+      <p:sp>
+        <p:nvSpPr>
+          <p:cNvPr id="35" name="Text 33"/>
+          <p:cNvSpPr/>
+          <p:nvPr/>
+        </p:nvSpPr>
+        <p:spPr>
+          <a:xfrm>
+            <a:off x="6903720" y="2331720"/>
+            <a:ext cx="4572000" cy="201168"/>
+          </a:xfrm>
+          <a:prstGeom prst="rect">
+            <a:avLst/>
+          </a:prstGeom>
+          <a:noFill/>
+          <a:ln/>
+        </p:spPr>
+        <p:txBody>
+          <a:bodyPr wrap="square" rtlCol="0" anchor="ctr"/>
+          <a:lstStyle/>
+          <a:p>
+            <a:pPr marL="0" indent="0">
+              <a:buNone/>
+            </a:pPr>
+            <a:r>
+              <a:rPr lang="en-US" sz="900" b="1" kern="0" spc="150" dirty="0">
+                <a:solidFill>
+                  <a:srgbClr val="C89728"/>
+                </a:solidFill>
+                <a:latin typeface="Calibri" pitchFamily="34" charset="0"/>
+                <a:ea typeface="Calibri" pitchFamily="34" charset="-122"/>
+                <a:cs typeface="Calibri" pitchFamily="34" charset="-120"/>
+              </a:rPr>
+              <a:t>EVENT STUDY — RETURN ON ASSETS</a:t>
+            </a:r>
+            <a:endParaRPr lang="en-US" sz="900" dirty="0"/>
+          </a:p>
+        </p:txBody>
+      </p:sp>
+      <p:sp>
+        <p:nvSpPr>
+          <p:cNvPr id="36" name="Shape 34"/>
+          <p:cNvSpPr/>
+          <p:nvPr/>
+        </p:nvSpPr>
+        <p:spPr>
+          <a:xfrm>
+            <a:off x="6903720" y="2514600"/>
+            <a:ext cx="5120640" cy="4407408"/>
           </a:xfrm>
           <a:prstGeom prst="rect">
             <a:avLst/>
@@ -17443,14 +18451,14 @@
       </p:sp>
       <p:sp>
         <p:nvSpPr>
-          <p:cNvPr id="19" name="Text 17"/>
-          <p:cNvSpPr/>
-          <p:nvPr/>
-        </p:nvSpPr>
-        <p:spPr>
-          <a:xfrm>
-            <a:off x="8458200" y="3566160"/>
-            <a:ext cx="3520440" cy="502920"/>
+          <p:cNvPr id="37" name="Text 35"/>
+          <p:cNvSpPr/>
+          <p:nvPr/>
+        </p:nvSpPr>
+        <p:spPr>
+          <a:xfrm>
+            <a:off x="6903720" y="4590288"/>
+            <a:ext cx="5120640" cy="320040"/>
           </a:xfrm>
           <a:prstGeom prst="rect">
             <a:avLst/>
@@ -17466,364 +18474,56 @@
               <a:buNone/>
             </a:pPr>
             <a:r>
+              <a:rPr lang="en-US" sz="1000" i="1" dirty="0">
+                <a:solidFill>
+                  <a:srgbClr val="C89728"/>
+                </a:solidFill>
+                <a:latin typeface="Calibri" pitchFamily="34" charset="0"/>
+                <a:ea typeface="Calibri" pitchFamily="34" charset="-122"/>
+                <a:cs typeface="Calibri" pitchFamily="34" charset="-120"/>
+              </a:rPr>
+              <a:t>Figure3d_EventStudy_ROA.png</a:t>
+            </a:r>
+            <a:endParaRPr lang="en-US" sz="1000" dirty="0"/>
+          </a:p>
+        </p:txBody>
+      </p:sp>
+      <p:sp>
+        <p:nvSpPr>
+          <p:cNvPr id="38" name="Text 36"/>
+          <p:cNvSpPr/>
+          <p:nvPr/>
+        </p:nvSpPr>
+        <p:spPr>
+          <a:xfrm>
+            <a:off x="6903720" y="6967728"/>
+            <a:ext cx="5120640" cy="320040"/>
+          </a:xfrm>
+          <a:prstGeom prst="rect">
+            <a:avLst/>
+          </a:prstGeom>
+          <a:noFill/>
+          <a:ln/>
+        </p:spPr>
+        <p:txBody>
+          <a:bodyPr wrap="square" rtlCol="0" anchor="ctr"/>
+          <a:lstStyle/>
+          <a:p>
+            <a:pPr marL="0" indent="0" algn="ctr">
+              <a:buNone/>
+            </a:pPr>
+            <a:r>
               <a:rPr lang="en-US" sz="950" i="1" dirty="0">
                 <a:solidFill>
-                  <a:srgbClr val="C89728"/>
-                </a:solidFill>
-                <a:latin typeface="Calibri" pitchFamily="34" charset="0"/>
-                <a:ea typeface="Calibri" pitchFamily="34" charset="-122"/>
-                <a:cs typeface="Calibri" pitchFamily="34" charset="-120"/>
-              </a:rPr>
-              <a:t>Figure3d_EventStudy_ROA.png</a:t>
+                  <a:srgbClr val="5A5A5A"/>
+                </a:solidFill>
+                <a:latin typeface="Calibri" pitchFamily="34" charset="0"/>
+                <a:ea typeface="Calibri" pitchFamily="34" charset="-122"/>
+                <a:cs typeface="Calibri" pitchFamily="34" charset="-120"/>
+              </a:rPr>
+              <a:t>Line falls below zero after Q0 and continues declining — no recovery within the observation window</a:t>
             </a:r>
             <a:endParaRPr lang="en-US" sz="950" dirty="0"/>
-          </a:p>
-          <a:p>
-            <a:pPr marL="0" indent="0" algn="ctr">
-              <a:buNone/>
-            </a:pPr>
-            <a:r>
-              <a:rPr lang="en-US" sz="950" i="1" dirty="0">
-                <a:solidFill>
-                  <a:srgbClr val="C89728"/>
-                </a:solidFill>
-                <a:latin typeface="Calibri" pitchFamily="34" charset="0"/>
-                <a:ea typeface="Calibri" pitchFamily="34" charset="-122"/>
-                <a:cs typeface="Calibri" pitchFamily="34" charset="-120"/>
-              </a:rPr>
-              <a:t>Figure7_CCULR_EventStudy.png</a:t>
-            </a:r>
-            <a:endParaRPr lang="en-US" sz="950" dirty="0"/>
-          </a:p>
-        </p:txBody>
-      </p:sp>
-      <p:sp>
-        <p:nvSpPr>
-          <p:cNvPr id="20" name="Text 18"/>
-          <p:cNvSpPr/>
-          <p:nvPr/>
-        </p:nvSpPr>
-        <p:spPr>
-          <a:xfrm>
-            <a:off x="1691640" y="3154680"/>
-            <a:ext cx="4572000" cy="201168"/>
-          </a:xfrm>
-          <a:prstGeom prst="rect">
-            <a:avLst/>
-          </a:prstGeom>
-          <a:noFill/>
-          <a:ln/>
-        </p:spPr>
-        <p:txBody>
-          <a:bodyPr wrap="square" rtlCol="0" anchor="ctr"/>
-          <a:lstStyle/>
-          <a:p>
-            <a:pPr marL="0" indent="0">
-              <a:buNone/>
-            </a:pPr>
-            <a:r>
-              <a:rPr lang="en-US" sz="900" b="1" kern="0" spc="150" dirty="0">
-                <a:solidFill>
-                  <a:srgbClr val="C89728"/>
-                </a:solidFill>
-                <a:latin typeface="Calibri" pitchFamily="34" charset="0"/>
-                <a:ea typeface="Calibri" pitchFamily="34" charset="-122"/>
-                <a:cs typeface="Calibri" pitchFamily="34" charset="-120"/>
-              </a:rPr>
-              <a:t>KEY POINTS</a:t>
-            </a:r>
-            <a:endParaRPr lang="en-US" sz="900" dirty="0"/>
-          </a:p>
-        </p:txBody>
-      </p:sp>
-      <p:sp>
-        <p:nvSpPr>
-          <p:cNvPr id="21" name="Text 19"/>
-          <p:cNvSpPr/>
-          <p:nvPr/>
-        </p:nvSpPr>
-        <p:spPr>
-          <a:xfrm>
-            <a:off x="1691640" y="3639312"/>
-            <a:ext cx="6583680" cy="1234440"/>
-          </a:xfrm>
-          <a:prstGeom prst="rect">
-            <a:avLst/>
-          </a:prstGeom>
-          <a:noFill/>
-          <a:ln/>
-        </p:spPr>
-        <p:txBody>
-          <a:bodyPr wrap="square" rtlCol="0" anchor="t"/>
-          <a:lstStyle/>
-          <a:p>
-            <a:pPr marL="342900" indent="-342900">
-              <a:spcAft>
-                <a:spcPts val="300"/>
-              </a:spcAft>
-              <a:buSzPct val="100000"/>
-              <a:buChar char="•"/>
-            </a:pPr>
-            <a:r>
-              <a:rPr lang="en-US" sz="1200" dirty="0">
-                <a:solidFill>
-                  <a:srgbClr val="1C1C1C"/>
-                </a:solidFill>
-                <a:latin typeface="Calibri" pitchFamily="34" charset="0"/>
-                <a:ea typeface="Calibri" pitchFamily="34" charset="-122"/>
-                <a:cs typeface="Calibri" pitchFamily="34" charset="-120"/>
-              </a:rPr>
-              <a:t>ROA decline is persistent — no evidence of adaptation or recovery through the observation window</a:t>
-            </a:r>
-            <a:endParaRPr lang="en-US" sz="1200" dirty="0"/>
-          </a:p>
-          <a:p>
-            <a:pPr marL="342900" indent="-342900">
-              <a:spcAft>
-                <a:spcPts val="300"/>
-              </a:spcAft>
-              <a:buSzPct val="100000"/>
-              <a:buChar char="•"/>
-            </a:pPr>
-            <a:r>
-              <a:rPr lang="en-US" sz="1200" dirty="0">
-                <a:solidFill>
-                  <a:srgbClr val="1C1C1C"/>
-                </a:solidFill>
-                <a:latin typeface="Calibri" pitchFamily="34" charset="0"/>
-                <a:ea typeface="Calibri" pitchFamily="34" charset="-122"/>
-                <a:cs typeface="Calibri" pitchFamily="34" charset="-120"/>
-              </a:rPr>
-              <a:t>Largest CUs (above $10B in assets) experience a decline nearly double the average</a:t>
-            </a:r>
-            <a:endParaRPr lang="en-US" sz="1200" dirty="0"/>
-          </a:p>
-          <a:p>
-            <a:pPr marL="342900" indent="-342900">
-              <a:spcAft>
-                <a:spcPts val="300"/>
-              </a:spcAft>
-              <a:buSzPct val="100000"/>
-              <a:buChar char="•"/>
-            </a:pPr>
-            <a:r>
-              <a:rPr lang="en-US" sz="1200" dirty="0">
-                <a:solidFill>
-                  <a:srgbClr val="1C1C1C"/>
-                </a:solidFill>
-                <a:latin typeface="Calibri" pitchFamily="34" charset="0"/>
-                <a:ea typeface="Calibri" pitchFamily="34" charset="-122"/>
-                <a:cs typeface="Calibri" pitchFamily="34" charset="-120"/>
-              </a:rPr>
-              <a:t>CCULR provided no significant relief on lending outcomes; CCULR adopters showed worse baseline outcomes consistent with distressed self-selection</a:t>
-            </a:r>
-            <a:endParaRPr lang="en-US" sz="1200" dirty="0"/>
-          </a:p>
-        </p:txBody>
-      </p:sp>
-      <p:sp>
-        <p:nvSpPr>
-          <p:cNvPr id="22" name="Shape 20"/>
-          <p:cNvSpPr/>
-          <p:nvPr/>
-        </p:nvSpPr>
-        <p:spPr>
-          <a:xfrm>
-            <a:off x="1691640" y="4828032"/>
-            <a:ext cx="6583680" cy="658368"/>
-          </a:xfrm>
-          <a:prstGeom prst="rect">
-            <a:avLst/>
-          </a:prstGeom>
-          <a:solidFill>
-            <a:srgbClr val="EDE8DF"/>
-          </a:solidFill>
-          <a:ln w="12700">
-            <a:solidFill>
-              <a:srgbClr val="C8C0B0"/>
-            </a:solidFill>
-            <a:prstDash val="solid"/>
-          </a:ln>
-        </p:spPr>
-        <p:txBody>
-          <a:bodyPr/>
-          <a:lstStyle/>
-          <a:p>
-            <a:endParaRPr lang="en-US"/>
-          </a:p>
-        </p:txBody>
-      </p:sp>
-      <p:sp>
-        <p:nvSpPr>
-          <p:cNvPr id="23" name="Shape 21"/>
-          <p:cNvSpPr/>
-          <p:nvPr/>
-        </p:nvSpPr>
-        <p:spPr>
-          <a:xfrm>
-            <a:off x="1691640" y="4828032"/>
-            <a:ext cx="64008" cy="658368"/>
-          </a:xfrm>
-          <a:prstGeom prst="rect">
-            <a:avLst/>
-          </a:prstGeom>
-          <a:solidFill>
-            <a:srgbClr val="C89728"/>
-          </a:solidFill>
-          <a:ln w="12700">
-            <a:solidFill>
-              <a:srgbClr val="C89728"/>
-            </a:solidFill>
-            <a:prstDash val="solid"/>
-          </a:ln>
-        </p:spPr>
-        <p:txBody>
-          <a:bodyPr/>
-          <a:lstStyle/>
-          <a:p>
-            <a:endParaRPr lang="en-US"/>
-          </a:p>
-        </p:txBody>
-      </p:sp>
-      <p:sp>
-        <p:nvSpPr>
-          <p:cNvPr id="24" name="Text 22"/>
-          <p:cNvSpPr/>
-          <p:nvPr/>
-        </p:nvSpPr>
-        <p:spPr>
-          <a:xfrm>
-            <a:off x="1828800" y="4873752"/>
-            <a:ext cx="6382512" cy="566928"/>
-          </a:xfrm>
-          <a:prstGeom prst="rect">
-            <a:avLst/>
-          </a:prstGeom>
-          <a:noFill/>
-          <a:ln/>
-        </p:spPr>
-        <p:txBody>
-          <a:bodyPr wrap="square" rtlCol="0" anchor="t"/>
-          <a:lstStyle/>
-          <a:p>
-            <a:pPr marL="0" indent="0">
-              <a:buNone/>
-            </a:pPr>
-            <a:r>
-              <a:rPr lang="en-US" sz="1050" dirty="0">
-                <a:solidFill>
-                  <a:srgbClr val="444444"/>
-                </a:solidFill>
-                <a:latin typeface="Calibri" pitchFamily="34" charset="0"/>
-                <a:ea typeface="Calibri" pitchFamily="34" charset="-122"/>
-                <a:cs typeface="Calibri" pitchFamily="34" charset="-120"/>
-              </a:rPr>
-              <a:t>Why this matters: Lower profitability reduces organic capital-building ability. A CU that cannot retain earnings must raise rates, cut lending, or draw down its capital ratio — all three patterns appear in the data.</a:t>
-            </a:r>
-            <a:endParaRPr lang="en-US" sz="1050" dirty="0"/>
-          </a:p>
-        </p:txBody>
-      </p:sp>
-      <p:sp>
-        <p:nvSpPr>
-          <p:cNvPr id="25" name="Shape 23"/>
-          <p:cNvSpPr/>
-          <p:nvPr/>
-        </p:nvSpPr>
-        <p:spPr>
-          <a:xfrm>
-            <a:off x="1691640" y="5559552"/>
-            <a:ext cx="6583680" cy="658368"/>
-          </a:xfrm>
-          <a:prstGeom prst="rect">
-            <a:avLst/>
-          </a:prstGeom>
-          <a:solidFill>
-            <a:srgbClr val="EDE8DF"/>
-          </a:solidFill>
-          <a:ln w="12700">
-            <a:solidFill>
-              <a:srgbClr val="C8C0B0"/>
-            </a:solidFill>
-            <a:prstDash val="solid"/>
-          </a:ln>
-        </p:spPr>
-        <p:txBody>
-          <a:bodyPr/>
-          <a:lstStyle/>
-          <a:p>
-            <a:endParaRPr lang="en-US"/>
-          </a:p>
-        </p:txBody>
-      </p:sp>
-      <p:sp>
-        <p:nvSpPr>
-          <p:cNvPr id="26" name="Shape 24"/>
-          <p:cNvSpPr/>
-          <p:nvPr/>
-        </p:nvSpPr>
-        <p:spPr>
-          <a:xfrm>
-            <a:off x="1691640" y="5559552"/>
-            <a:ext cx="64008" cy="658368"/>
-          </a:xfrm>
-          <a:prstGeom prst="rect">
-            <a:avLst/>
-          </a:prstGeom>
-          <a:solidFill>
-            <a:srgbClr val="C89728"/>
-          </a:solidFill>
-          <a:ln w="12700">
-            <a:solidFill>
-              <a:srgbClr val="C89728"/>
-            </a:solidFill>
-            <a:prstDash val="solid"/>
-          </a:ln>
-        </p:spPr>
-        <p:txBody>
-          <a:bodyPr/>
-          <a:lstStyle/>
-          <a:p>
-            <a:endParaRPr lang="en-US"/>
-          </a:p>
-        </p:txBody>
-      </p:sp>
-      <p:sp>
-        <p:nvSpPr>
-          <p:cNvPr id="27" name="Text 25"/>
-          <p:cNvSpPr/>
-          <p:nvPr/>
-        </p:nvSpPr>
-        <p:spPr>
-          <a:xfrm>
-            <a:off x="1828800" y="5605272"/>
-            <a:ext cx="6382512" cy="566928"/>
-          </a:xfrm>
-          <a:prstGeom prst="rect">
-            <a:avLst/>
-          </a:prstGeom>
-          <a:noFill/>
-          <a:ln/>
-        </p:spPr>
-        <p:txBody>
-          <a:bodyPr wrap="square" rtlCol="0" anchor="t"/>
-          <a:lstStyle/>
-          <a:p>
-            <a:pPr marL="0" indent="0">
-              <a:buNone/>
-            </a:pPr>
-            <a:r>
-              <a:rPr lang="en-US" sz="1050" dirty="0">
-                <a:solidFill>
-                  <a:srgbClr val="444444"/>
-                </a:solidFill>
-                <a:latin typeface="Calibri" pitchFamily="34" charset="0"/>
-                <a:ea typeface="Calibri" pitchFamily="34" charset="-122"/>
-                <a:cs typeface="Calibri" pitchFamily="34" charset="-120"/>
-              </a:rPr>
-              <a:t>CCULR finding: Institutions most likely to adopt the Community Credit Union Leverage Ratio were already under financial stress — CCULR adoption did not cause or reverse their worse outcomes.</a:t>
-            </a:r>
-            <a:endParaRPr lang="en-US" sz="1050" dirty="0"/>
           </a:p>
         </p:txBody>
       </p:sp>
@@ -18209,7 +18909,7 @@
                 <a:ea typeface="Calibri" pitchFamily="34" charset="-122"/>
                 <a:cs typeface="Calibri" pitchFamily="34" charset="-120"/>
               </a:rPr>
-              <a:t>Answer: The rule provides a quantifiable but modest degree of protection against institutional failure. At 2008 crisis severity, it shields approximately 24 institutions — but most of that protection was already building organically before the rule.</a:t>
+              <a:t>Answer: The rule provides real but modest protection. All three numbers below are simulated failure rates under a 2008-level stress — the question is simply which capital level each institution starts from.</a:t>
             </a:r>
             <a:endParaRPr lang="en-US" sz="1250" dirty="0"/>
           </a:p>
@@ -18248,7 +18948,7 @@
                 <a:ea typeface="Calibri" pitchFamily="34" charset="-122"/>
                 <a:cs typeface="Calibri" pitchFamily="34" charset="-120"/>
               </a:rPr>
-              <a:t>STRESS TEST — SIMULATED FAILURE RATES AT 2008 GFC SEVERITY</a:t>
+              <a:t>STRESS TEST — % OF COMPLEX CUs FALLING BELOW 7% CAPITAL FLOOR  (2008 GFC SEVERITY APPLIED TO EACH SCENARIO)</a:t>
             </a:r>
             <a:endParaRPr lang="en-US" sz="900" dirty="0"/>
           </a:p>
@@ -18263,7 +18963,219 @@
         <p:spPr>
           <a:xfrm>
             <a:off x="1691640" y="2542032"/>
-            <a:ext cx="4846320" cy="1417320"/>
+            <a:ext cx="3246120" cy="1691640"/>
+          </a:xfrm>
+          <a:prstGeom prst="rect">
+            <a:avLst/>
+          </a:prstGeom>
+          <a:solidFill>
+            <a:srgbClr val="2A3D5A"/>
+          </a:solidFill>
+          <a:ln w="12700">
+            <a:solidFill>
+              <a:srgbClr val="2A3D5A"/>
+            </a:solidFill>
+            <a:prstDash val="solid"/>
+          </a:ln>
+          <a:effectLst>
+            <a:outerShdw blurRad="76200" dist="25400" dir="8100000" algn="bl" rotWithShape="0">
+              <a:srgbClr val="000000">
+                <a:alpha val="12000"/>
+              </a:srgbClr>
+            </a:outerShdw>
+          </a:effectLst>
+        </p:spPr>
+        <p:txBody>
+          <a:bodyPr/>
+          <a:lstStyle/>
+          <a:p>
+            <a:endParaRPr lang="en-US"/>
+          </a:p>
+        </p:txBody>
+      </p:sp>
+      <p:sp>
+        <p:nvSpPr>
+          <p:cNvPr id="14" name="Text 12"/>
+          <p:cNvSpPr/>
+          <p:nvPr/>
+        </p:nvSpPr>
+        <p:spPr>
+          <a:xfrm>
+            <a:off x="1783080" y="2578608"/>
+            <a:ext cx="3063240" cy="384048"/>
+          </a:xfrm>
+          <a:prstGeom prst="rect">
+            <a:avLst/>
+          </a:prstGeom>
+          <a:noFill/>
+          <a:ln/>
+        </p:spPr>
+        <p:txBody>
+          <a:bodyPr wrap="square" rtlCol="0" anchor="ctr"/>
+          <a:lstStyle/>
+          <a:p>
+            <a:pPr marL="0" indent="0">
+              <a:buNone/>
+            </a:pPr>
+            <a:r>
+              <a:rPr lang="en-US" sz="850" b="1" kern="0" spc="50" dirty="0">
+                <a:solidFill>
+                  <a:srgbClr val="C89728"/>
+                </a:solidFill>
+                <a:latin typeface="Calibri" pitchFamily="34" charset="0"/>
+                <a:ea typeface="Calibri" pitchFamily="34" charset="-122"/>
+                <a:cs typeface="Calibri" pitchFamily="34" charset="-120"/>
+              </a:rPr>
+              <a:t>SCENARIO 1</a:t>
+            </a:r>
+            <a:endParaRPr lang="en-US" sz="850" dirty="0"/>
+          </a:p>
+          <a:p>
+            <a:pPr marL="0" indent="0">
+              <a:buNone/>
+            </a:pPr>
+            <a:r>
+              <a:rPr lang="en-US" sz="850" b="1" kern="0" spc="50" dirty="0">
+                <a:solidFill>
+                  <a:srgbClr val="C89728"/>
+                </a:solidFill>
+                <a:latin typeface="Calibri" pitchFamily="34" charset="0"/>
+                <a:ea typeface="Calibri" pitchFamily="34" charset="-122"/>
+                <a:cs typeface="Calibri" pitchFamily="34" charset="-120"/>
+              </a:rPr>
+              <a:t>PRE-RULE CAPITAL</a:t>
+            </a:r>
+            <a:endParaRPr lang="en-US" sz="850" dirty="0"/>
+          </a:p>
+        </p:txBody>
+      </p:sp>
+      <p:sp>
+        <p:nvSpPr>
+          <p:cNvPr id="15" name="Text 13"/>
+          <p:cNvSpPr/>
+          <p:nvPr/>
+        </p:nvSpPr>
+        <p:spPr>
+          <a:xfrm>
+            <a:off x="1783080" y="2944368"/>
+            <a:ext cx="3063240" cy="201168"/>
+          </a:xfrm>
+          <a:prstGeom prst="rect">
+            <a:avLst/>
+          </a:prstGeom>
+          <a:noFill/>
+          <a:ln/>
+        </p:spPr>
+        <p:txBody>
+          <a:bodyPr wrap="square" rtlCol="0" anchor="ctr"/>
+          <a:lstStyle/>
+          <a:p>
+            <a:pPr marL="0" indent="0">
+              <a:buNone/>
+            </a:pPr>
+            <a:r>
+              <a:rPr lang="en-US" sz="850" i="1" dirty="0">
+                <a:solidFill>
+                  <a:srgbClr val="B8C4D8"/>
+                </a:solidFill>
+                <a:latin typeface="Calibri" pitchFamily="34" charset="0"/>
+                <a:ea typeface="Calibri" pitchFamily="34" charset="-122"/>
+                <a:cs typeface="Calibri" pitchFamily="34" charset="-120"/>
+              </a:rPr>
+              <a:t>Using 2019–2021 capital levels</a:t>
+            </a:r>
+            <a:endParaRPr lang="en-US" sz="850" dirty="0"/>
+          </a:p>
+        </p:txBody>
+      </p:sp>
+      <p:sp>
+        <p:nvSpPr>
+          <p:cNvPr id="16" name="Text 14"/>
+          <p:cNvSpPr/>
+          <p:nvPr/>
+        </p:nvSpPr>
+        <p:spPr>
+          <a:xfrm>
+            <a:off x="1783080" y="3127248"/>
+            <a:ext cx="3063240" cy="502920"/>
+          </a:xfrm>
+          <a:prstGeom prst="rect">
+            <a:avLst/>
+          </a:prstGeom>
+          <a:noFill/>
+          <a:ln/>
+        </p:spPr>
+        <p:txBody>
+          <a:bodyPr wrap="square" rtlCol="0" anchor="ctr"/>
+          <a:lstStyle/>
+          <a:p>
+            <a:pPr marL="0" indent="0" algn="ctr">
+              <a:buNone/>
+            </a:pPr>
+            <a:r>
+              <a:rPr lang="en-US" sz="3000" b="1" dirty="0">
+                <a:solidFill>
+                  <a:srgbClr val="95D5B2"/>
+                </a:solidFill>
+                <a:latin typeface="Calibri" pitchFamily="34" charset="0"/>
+                <a:ea typeface="Calibri" pitchFamily="34" charset="-122"/>
+                <a:cs typeface="Calibri" pitchFamily="34" charset="-120"/>
+              </a:rPr>
+              <a:t>19.1%</a:t>
+            </a:r>
+            <a:endParaRPr lang="en-US" sz="3000" dirty="0"/>
+          </a:p>
+        </p:txBody>
+      </p:sp>
+      <p:sp>
+        <p:nvSpPr>
+          <p:cNvPr id="17" name="Text 15"/>
+          <p:cNvSpPr/>
+          <p:nvPr/>
+        </p:nvSpPr>
+        <p:spPr>
+          <a:xfrm>
+            <a:off x="1783080" y="3611880"/>
+            <a:ext cx="3063240" cy="566928"/>
+          </a:xfrm>
+          <a:prstGeom prst="rect">
+            <a:avLst/>
+          </a:prstGeom>
+          <a:noFill/>
+          <a:ln/>
+        </p:spPr>
+        <p:txBody>
+          <a:bodyPr wrap="square" rtlCol="0" anchor="ctr"/>
+          <a:lstStyle/>
+          <a:p>
+            <a:pPr marL="0" indent="0">
+              <a:buNone/>
+            </a:pPr>
+            <a:r>
+              <a:rPr lang="en-US" sz="900" dirty="0">
+                <a:solidFill>
+                  <a:srgbClr val="B8C4D8"/>
+                </a:solidFill>
+                <a:latin typeface="Calibri" pitchFamily="34" charset="0"/>
+                <a:ea typeface="Calibri" pitchFamily="34" charset="-122"/>
+                <a:cs typeface="Calibri" pitchFamily="34" charset="-120"/>
+              </a:rPr>
+              <a:t>Baseline: what failure rates looked like before the rule existed</a:t>
+            </a:r>
+            <a:endParaRPr lang="en-US" sz="900" dirty="0"/>
+          </a:p>
+        </p:txBody>
+      </p:sp>
+      <p:sp>
+        <p:nvSpPr>
+          <p:cNvPr id="18" name="Shape 16"/>
+          <p:cNvSpPr/>
+          <p:nvPr/>
+        </p:nvSpPr>
+        <p:spPr>
+          <a:xfrm>
+            <a:off x="5074920" y="2542032"/>
+            <a:ext cx="3246120" cy="1691640"/>
           </a:xfrm>
           <a:prstGeom prst="rect">
             <a:avLst/>
@@ -18295,14 +19207,14 @@
       </p:sp>
       <p:sp>
         <p:nvSpPr>
-          <p:cNvPr id="14" name="Text 12"/>
-          <p:cNvSpPr/>
-          <p:nvPr/>
-        </p:nvSpPr>
-        <p:spPr>
-          <a:xfrm>
-            <a:off x="1783080" y="2578608"/>
-            <a:ext cx="4663440" cy="274320"/>
+          <p:cNvPr id="19" name="Text 17"/>
+          <p:cNvSpPr/>
+          <p:nvPr/>
+        </p:nvSpPr>
+        <p:spPr>
+          <a:xfrm>
+            <a:off x="5166360" y="2578608"/>
+            <a:ext cx="3063240" cy="384048"/>
           </a:xfrm>
           <a:prstGeom prst="rect">
             <a:avLst/>
@@ -18318,7 +19230,7 @@
               <a:buNone/>
             </a:pPr>
             <a:r>
-              <a:rPr lang="en-US" sz="900" b="1" kern="0" spc="100" dirty="0">
+              <a:rPr lang="en-US" sz="850" b="1" kern="0" spc="50" dirty="0">
                 <a:solidFill>
                   <a:srgbClr val="C89728"/>
                 </a:solidFill>
@@ -18326,7 +19238,141 @@
                 <a:ea typeface="Calibri" pitchFamily="34" charset="-122"/>
                 <a:cs typeface="Calibri" pitchFamily="34" charset="-120"/>
               </a:rPr>
-              <a:t>CURRENT RULE IN PLACE</a:t>
+              <a:t>SCENARIO 2</a:t>
+            </a:r>
+            <a:endParaRPr lang="en-US" sz="850" dirty="0"/>
+          </a:p>
+          <a:p>
+            <a:pPr marL="0" indent="0">
+              <a:buNone/>
+            </a:pPr>
+            <a:r>
+              <a:rPr lang="en-US" sz="850" b="1" kern="0" spc="50" dirty="0">
+                <a:solidFill>
+                  <a:srgbClr val="C89728"/>
+                </a:solidFill>
+                <a:latin typeface="Calibri" pitchFamily="34" charset="0"/>
+                <a:ea typeface="Calibri" pitchFamily="34" charset="-122"/>
+                <a:cs typeface="Calibri" pitchFamily="34" charset="-120"/>
+              </a:rPr>
+              <a:t>WITH RULE IN PLACE</a:t>
+            </a:r>
+            <a:endParaRPr lang="en-US" sz="850" dirty="0"/>
+          </a:p>
+        </p:txBody>
+      </p:sp>
+      <p:sp>
+        <p:nvSpPr>
+          <p:cNvPr id="20" name="Text 18"/>
+          <p:cNvSpPr/>
+          <p:nvPr/>
+        </p:nvSpPr>
+        <p:spPr>
+          <a:xfrm>
+            <a:off x="5166360" y="2944368"/>
+            <a:ext cx="3063240" cy="201168"/>
+          </a:xfrm>
+          <a:prstGeom prst="rect">
+            <a:avLst/>
+          </a:prstGeom>
+          <a:noFill/>
+          <a:ln/>
+        </p:spPr>
+        <p:txBody>
+          <a:bodyPr wrap="square" rtlCol="0" anchor="ctr"/>
+          <a:lstStyle/>
+          <a:p>
+            <a:pPr marL="0" indent="0">
+              <a:buNone/>
+            </a:pPr>
+            <a:r>
+              <a:rPr lang="en-US" sz="850" i="1" dirty="0">
+                <a:solidFill>
+                  <a:srgbClr val="B8C4D8"/>
+                </a:solidFill>
+                <a:latin typeface="Calibri" pitchFamily="34" charset="0"/>
+                <a:ea typeface="Calibri" pitchFamily="34" charset="-122"/>
+                <a:cs typeface="Calibri" pitchFamily="34" charset="-120"/>
+              </a:rPr>
+              <a:t>Using 2024–2025 capital levels</a:t>
+            </a:r>
+            <a:endParaRPr lang="en-US" sz="850" dirty="0"/>
+          </a:p>
+        </p:txBody>
+      </p:sp>
+      <p:sp>
+        <p:nvSpPr>
+          <p:cNvPr id="21" name="Text 19"/>
+          <p:cNvSpPr/>
+          <p:nvPr/>
+        </p:nvSpPr>
+        <p:spPr>
+          <a:xfrm>
+            <a:off x="5166360" y="3127248"/>
+            <a:ext cx="3063240" cy="502920"/>
+          </a:xfrm>
+          <a:prstGeom prst="rect">
+            <a:avLst/>
+          </a:prstGeom>
+          <a:noFill/>
+          <a:ln/>
+        </p:spPr>
+        <p:txBody>
+          <a:bodyPr wrap="square" rtlCol="0" anchor="ctr"/>
+          <a:lstStyle/>
+          <a:p>
+            <a:pPr marL="0" indent="0" algn="ctr">
+              <a:buNone/>
+            </a:pPr>
+            <a:r>
+              <a:rPr lang="en-US" sz="3000" b="1" dirty="0">
+                <a:solidFill>
+                  <a:srgbClr val="95D5B2"/>
+                </a:solidFill>
+                <a:latin typeface="Calibri" pitchFamily="34" charset="0"/>
+                <a:ea typeface="Calibri" pitchFamily="34" charset="-122"/>
+                <a:cs typeface="Calibri" pitchFamily="34" charset="-120"/>
+              </a:rPr>
+              <a:t>19.4%</a:t>
+            </a:r>
+            <a:endParaRPr lang="en-US" sz="3000" dirty="0"/>
+          </a:p>
+        </p:txBody>
+      </p:sp>
+      <p:sp>
+        <p:nvSpPr>
+          <p:cNvPr id="22" name="Text 20"/>
+          <p:cNvSpPr/>
+          <p:nvPr/>
+        </p:nvSpPr>
+        <p:spPr>
+          <a:xfrm>
+            <a:off x="5166360" y="3611880"/>
+            <a:ext cx="3063240" cy="566928"/>
+          </a:xfrm>
+          <a:prstGeom prst="rect">
+            <a:avLst/>
+          </a:prstGeom>
+          <a:noFill/>
+          <a:ln/>
+        </p:spPr>
+        <p:txBody>
+          <a:bodyPr wrap="square" rtlCol="0" anchor="ctr"/>
+          <a:lstStyle/>
+          <a:p>
+            <a:pPr marL="0" indent="0">
+              <a:buNone/>
+            </a:pPr>
+            <a:r>
+              <a:rPr lang="en-US" sz="900" dirty="0">
+                <a:solidFill>
+                  <a:srgbClr val="B8C4D8"/>
+                </a:solidFill>
+                <a:latin typeface="Calibri" pitchFamily="34" charset="0"/>
+                <a:ea typeface="Calibri" pitchFamily="34" charset="-122"/>
+                <a:cs typeface="Calibri" pitchFamily="34" charset="-120"/>
+              </a:rPr>
+              <a:t>Only 0.3pp better than pre-rule — because CUs were already building capital organically</a:t>
             </a:r>
             <a:endParaRPr lang="en-US" sz="900" dirty="0"/>
           </a:p>
@@ -18334,187 +19380,14 @@
       </p:sp>
       <p:sp>
         <p:nvSpPr>
-          <p:cNvPr id="15" name="Text 13"/>
-          <p:cNvSpPr/>
-          <p:nvPr/>
-        </p:nvSpPr>
-        <p:spPr>
-          <a:xfrm>
-            <a:off x="1783080" y="2834640"/>
-            <a:ext cx="2194560" cy="640080"/>
-          </a:xfrm>
-          <a:prstGeom prst="rect">
-            <a:avLst/>
-          </a:prstGeom>
-          <a:noFill/>
-          <a:ln/>
-        </p:spPr>
-        <p:txBody>
-          <a:bodyPr wrap="square" rtlCol="0" anchor="ctr"/>
-          <a:lstStyle/>
-          <a:p>
-            <a:pPr marL="0" indent="0">
-              <a:buNone/>
-            </a:pPr>
-            <a:r>
-              <a:rPr lang="en-US" sz="3400" b="1" dirty="0">
-                <a:solidFill>
-                  <a:srgbClr val="95D5B2"/>
-                </a:solidFill>
-                <a:latin typeface="Calibri" pitchFamily="34" charset="0"/>
-                <a:ea typeface="Calibri" pitchFamily="34" charset="-122"/>
-                <a:cs typeface="Calibri" pitchFamily="34" charset="-120"/>
-              </a:rPr>
-              <a:t>19.4%</a:t>
-            </a:r>
-            <a:endParaRPr lang="en-US" sz="3400" dirty="0"/>
-          </a:p>
-        </p:txBody>
-      </p:sp>
-      <p:sp>
-        <p:nvSpPr>
-          <p:cNvPr id="16" name="Text 14"/>
-          <p:cNvSpPr/>
-          <p:nvPr/>
-        </p:nvSpPr>
-        <p:spPr>
-          <a:xfrm>
-            <a:off x="3977640" y="2834640"/>
-            <a:ext cx="2377440" cy="640080"/>
-          </a:xfrm>
-          <a:prstGeom prst="rect">
-            <a:avLst/>
-          </a:prstGeom>
-          <a:noFill/>
-          <a:ln/>
-        </p:spPr>
-        <p:txBody>
-          <a:bodyPr wrap="square" rtlCol="0" anchor="ctr"/>
-          <a:lstStyle/>
-          <a:p>
-            <a:pPr marL="0" indent="0">
-              <a:buNone/>
-            </a:pPr>
-            <a:r>
-              <a:rPr lang="en-US" sz="1050" dirty="0">
-                <a:solidFill>
-                  <a:srgbClr val="B8C4D8"/>
-                </a:solidFill>
-                <a:latin typeface="Calibri" pitchFamily="34" charset="0"/>
-                <a:ea typeface="Calibri" pitchFamily="34" charset="-122"/>
-                <a:cs typeface="Calibri" pitchFamily="34" charset="-120"/>
-              </a:rPr>
-              <a:t>simulated failure rate</a:t>
-            </a:r>
-            <a:endParaRPr lang="en-US" sz="1050" dirty="0"/>
-          </a:p>
-          <a:p>
-            <a:pPr marL="0" indent="0">
-              <a:buNone/>
-            </a:pPr>
-            <a:r>
-              <a:rPr lang="en-US" sz="1050" dirty="0">
-                <a:solidFill>
-                  <a:srgbClr val="B8C4D8"/>
-                </a:solidFill>
-                <a:latin typeface="Calibri" pitchFamily="34" charset="0"/>
-                <a:ea typeface="Calibri" pitchFamily="34" charset="-122"/>
-                <a:cs typeface="Calibri" pitchFamily="34" charset="-120"/>
-              </a:rPr>
-              <a:t>at 2008 crisis severity</a:t>
-            </a:r>
-            <a:endParaRPr lang="en-US" sz="1050" dirty="0"/>
-          </a:p>
-        </p:txBody>
-      </p:sp>
-      <p:sp>
-        <p:nvSpPr>
-          <p:cNvPr id="17" name="Text 15"/>
-          <p:cNvSpPr/>
-          <p:nvPr/>
-        </p:nvSpPr>
-        <p:spPr>
-          <a:xfrm>
-            <a:off x="1783080" y="3456432"/>
-            <a:ext cx="4663440" cy="438912"/>
-          </a:xfrm>
-          <a:prstGeom prst="rect">
-            <a:avLst/>
-          </a:prstGeom>
-          <a:noFill/>
-          <a:ln/>
-        </p:spPr>
-        <p:txBody>
-          <a:bodyPr wrap="square" rtlCol="0" anchor="ctr"/>
-          <a:lstStyle/>
-          <a:p>
-            <a:pPr marL="0" indent="0">
-              <a:buNone/>
-            </a:pPr>
-            <a:r>
-              <a:rPr lang="en-US" sz="950" dirty="0">
-                <a:solidFill>
-                  <a:srgbClr val="8FA4C8"/>
-                </a:solidFill>
-                <a:latin typeface="Calibri" pitchFamily="34" charset="0"/>
-                <a:ea typeface="Calibri" pitchFamily="34" charset="-122"/>
-                <a:cs typeface="Calibri" pitchFamily="34" charset="-120"/>
-              </a:rPr>
-              <a:t>Complex CUs were already building capital before the rule — the rule adds only 0.3 percentage points of incremental protection above what they had accumulated on their own.</a:t>
-            </a:r>
-            <a:endParaRPr lang="en-US" sz="950" dirty="0"/>
-          </a:p>
-        </p:txBody>
-      </p:sp>
-      <p:sp>
-        <p:nvSpPr>
-          <p:cNvPr id="18" name="Text 16"/>
-          <p:cNvSpPr/>
-          <p:nvPr/>
-        </p:nvSpPr>
-        <p:spPr>
-          <a:xfrm>
-            <a:off x="6656832" y="2926080"/>
-            <a:ext cx="274320" cy="457200"/>
-          </a:xfrm>
-          <a:prstGeom prst="rect">
-            <a:avLst/>
-          </a:prstGeom>
-          <a:noFill/>
-          <a:ln/>
-        </p:spPr>
-        <p:txBody>
-          <a:bodyPr wrap="square" rtlCol="0" anchor="ctr"/>
-          <a:lstStyle/>
-          <a:p>
-            <a:pPr marL="0" indent="0" algn="ctr">
-              <a:buNone/>
-            </a:pPr>
-            <a:r>
-              <a:rPr lang="en-US" sz="2200" b="1" dirty="0">
-                <a:solidFill>
-                  <a:srgbClr val="C89728"/>
-                </a:solidFill>
-                <a:latin typeface="Calibri" pitchFamily="34" charset="0"/>
-                <a:ea typeface="Calibri" pitchFamily="34" charset="-122"/>
-                <a:cs typeface="Calibri" pitchFamily="34" charset="-120"/>
-              </a:rPr>
-              <a:t>→</a:t>
-            </a:r>
-            <a:endParaRPr lang="en-US" sz="2200" dirty="0"/>
-          </a:p>
-        </p:txBody>
-      </p:sp>
-      <p:sp>
-        <p:nvSpPr>
-          <p:cNvPr id="19" name="Shape 17"/>
-          <p:cNvSpPr/>
-          <p:nvPr/>
-        </p:nvSpPr>
-        <p:spPr>
-          <a:xfrm>
-            <a:off x="6995160" y="2542032"/>
-            <a:ext cx="5029200" cy="1417320"/>
+          <p:cNvPr id="23" name="Shape 21"/>
+          <p:cNvSpPr/>
+          <p:nvPr/>
+        </p:nvSpPr>
+        <p:spPr>
+          <a:xfrm>
+            <a:off x="8458200" y="2542032"/>
+            <a:ext cx="3246120" cy="1691640"/>
           </a:xfrm>
           <a:prstGeom prst="rect">
             <a:avLst/>
@@ -18546,14 +19419,14 @@
       </p:sp>
       <p:sp>
         <p:nvSpPr>
-          <p:cNvPr id="20" name="Text 18"/>
-          <p:cNvSpPr/>
-          <p:nvPr/>
-        </p:nvSpPr>
-        <p:spPr>
-          <a:xfrm>
-            <a:off x="7086600" y="2578608"/>
-            <a:ext cx="4846320" cy="274320"/>
+          <p:cNvPr id="24" name="Text 22"/>
+          <p:cNvSpPr/>
+          <p:nvPr/>
+        </p:nvSpPr>
+        <p:spPr>
+          <a:xfrm>
+            <a:off x="8549640" y="2578608"/>
+            <a:ext cx="3063240" cy="384048"/>
           </a:xfrm>
           <a:prstGeom prst="rect">
             <a:avLst/>
@@ -18569,7 +19442,102 @@
               <a:buNone/>
             </a:pPr>
             <a:r>
-              <a:rPr lang="en-US" sz="900" b="1" kern="0" spc="100" dirty="0">
+              <a:rPr lang="en-US" sz="850" b="1" kern="0" spc="50" dirty="0">
+                <a:solidFill>
+                  <a:srgbClr val="C89728"/>
+                </a:solidFill>
+                <a:latin typeface="Calibri" pitchFamily="34" charset="0"/>
+                <a:ea typeface="Calibri" pitchFamily="34" charset="-122"/>
+                <a:cs typeface="Calibri" pitchFamily="34" charset="-120"/>
+              </a:rPr>
+              <a:t>SCENARIO 3</a:t>
+            </a:r>
+            <a:endParaRPr lang="en-US" sz="850" dirty="0"/>
+          </a:p>
+          <a:p>
+            <a:pPr marL="0" indent="0">
+              <a:buNone/>
+            </a:pPr>
+            <a:r>
+              <a:rPr lang="en-US" sz="850" b="1" kern="0" spc="50" dirty="0">
+                <a:solidFill>
+                  <a:srgbClr val="C89728"/>
+                </a:solidFill>
+                <a:latin typeface="Calibri" pitchFamily="34" charset="0"/>
+                <a:ea typeface="Calibri" pitchFamily="34" charset="-122"/>
+                <a:cs typeface="Calibri" pitchFamily="34" charset="-120"/>
+              </a:rPr>
+              <a:t>IF RULE IS REMOVED</a:t>
+            </a:r>
+            <a:endParaRPr lang="en-US" sz="850" dirty="0"/>
+          </a:p>
+        </p:txBody>
+      </p:sp>
+      <p:sp>
+        <p:nvSpPr>
+          <p:cNvPr id="25" name="Text 23"/>
+          <p:cNvSpPr/>
+          <p:nvPr/>
+        </p:nvSpPr>
+        <p:spPr>
+          <a:xfrm>
+            <a:off x="8549640" y="2944368"/>
+            <a:ext cx="3063240" cy="201168"/>
+          </a:xfrm>
+          <a:prstGeom prst="rect">
+            <a:avLst/>
+          </a:prstGeom>
+          <a:noFill/>
+          <a:ln/>
+        </p:spPr>
+        <p:txBody>
+          <a:bodyPr wrap="square" rtlCol="0" anchor="ctr"/>
+          <a:lstStyle/>
+          <a:p>
+            <a:pPr marL="0" indent="0">
+              <a:buNone/>
+            </a:pPr>
+            <a:r>
+              <a:rPr lang="en-US" sz="850" i="1" dirty="0">
+                <a:solidFill>
+                  <a:srgbClr val="B8C4D8"/>
+                </a:solidFill>
+                <a:latin typeface="Calibri" pitchFamily="34" charset="0"/>
+                <a:ea typeface="Calibri" pitchFamily="34" charset="-122"/>
+                <a:cs typeface="Calibri" pitchFamily="34" charset="-120"/>
+              </a:rPr>
+              <a:t>Unwinding rule-induced buffers</a:t>
+            </a:r>
+            <a:endParaRPr lang="en-US" sz="850" dirty="0"/>
+          </a:p>
+        </p:txBody>
+      </p:sp>
+      <p:sp>
+        <p:nvSpPr>
+          <p:cNvPr id="26" name="Text 24"/>
+          <p:cNvSpPr/>
+          <p:nvPr/>
+        </p:nvSpPr>
+        <p:spPr>
+          <a:xfrm>
+            <a:off x="8549640" y="3127248"/>
+            <a:ext cx="3063240" cy="502920"/>
+          </a:xfrm>
+          <a:prstGeom prst="rect">
+            <a:avLst/>
+          </a:prstGeom>
+          <a:noFill/>
+          <a:ln/>
+        </p:spPr>
+        <p:txBody>
+          <a:bodyPr wrap="square" rtlCol="0" anchor="ctr"/>
+          <a:lstStyle/>
+          <a:p>
+            <a:pPr marL="0" indent="0" algn="ctr">
+              <a:buNone/>
+            </a:pPr>
+            <a:r>
+              <a:rPr lang="en-US" sz="3000" b="1" dirty="0">
                 <a:solidFill>
                   <a:srgbClr val="F4A5A8"/>
                 </a:solidFill>
@@ -18577,7 +19545,46 @@
                 <a:ea typeface="Calibri" pitchFamily="34" charset="-122"/>
                 <a:cs typeface="Calibri" pitchFamily="34" charset="-120"/>
               </a:rPr>
-              <a:t>WITHOUT THE RULE</a:t>
+              <a:t>22.5%</a:t>
+            </a:r>
+            <a:endParaRPr lang="en-US" sz="3000" dirty="0"/>
+          </a:p>
+        </p:txBody>
+      </p:sp>
+      <p:sp>
+        <p:nvSpPr>
+          <p:cNvPr id="27" name="Text 25"/>
+          <p:cNvSpPr/>
+          <p:nvPr/>
+        </p:nvSpPr>
+        <p:spPr>
+          <a:xfrm>
+            <a:off x="8549640" y="3611880"/>
+            <a:ext cx="3063240" cy="566928"/>
+          </a:xfrm>
+          <a:prstGeom prst="rect">
+            <a:avLst/>
+          </a:prstGeom>
+          <a:noFill/>
+          <a:ln/>
+        </p:spPr>
+        <p:txBody>
+          <a:bodyPr wrap="square" rtlCol="0" anchor="ctr"/>
+          <a:lstStyle/>
+          <a:p>
+            <a:pPr marL="0" indent="0">
+              <a:buNone/>
+            </a:pPr>
+            <a:r>
+              <a:rPr lang="en-US" sz="900" dirty="0">
+                <a:solidFill>
+                  <a:srgbClr val="B8C4D8"/>
+                </a:solidFill>
+                <a:latin typeface="Calibri" pitchFamily="34" charset="0"/>
+                <a:ea typeface="Calibri" pitchFamily="34" charset="-122"/>
+                <a:cs typeface="Calibri" pitchFamily="34" charset="-120"/>
+              </a:rPr>
+              <a:t>+3.1pp vs. Scenario 2 — ∼24 additional institutions, ~$14B assets each</a:t>
             </a:r>
             <a:endParaRPr lang="en-US" sz="900" dirty="0"/>
           </a:p>
@@ -18585,14 +19592,14 @@
       </p:sp>
       <p:sp>
         <p:nvSpPr>
-          <p:cNvPr id="21" name="Text 19"/>
-          <p:cNvSpPr/>
-          <p:nvPr/>
-        </p:nvSpPr>
-        <p:spPr>
-          <a:xfrm>
-            <a:off x="7086600" y="2834640"/>
-            <a:ext cx="2194560" cy="640080"/>
+          <p:cNvPr id="28" name="Text 26"/>
+          <p:cNvSpPr/>
+          <p:nvPr/>
+        </p:nvSpPr>
+        <p:spPr>
+          <a:xfrm>
+            <a:off x="4736592" y="3063240"/>
+            <a:ext cx="292608" cy="411480"/>
           </a:xfrm>
           <a:prstGeom prst="rect">
             <a:avLst/>
@@ -18604,34 +19611,34 @@
           <a:bodyPr wrap="square" rtlCol="0" anchor="ctr"/>
           <a:lstStyle/>
           <a:p>
-            <a:pPr marL="0" indent="0">
-              <a:buNone/>
-            </a:pPr>
-            <a:r>
-              <a:rPr lang="en-US" sz="3400" b="1" dirty="0">
-                <a:solidFill>
-                  <a:srgbClr val="F4A5A8"/>
-                </a:solidFill>
-                <a:latin typeface="Calibri" pitchFamily="34" charset="0"/>
-                <a:ea typeface="Calibri" pitchFamily="34" charset="-122"/>
-                <a:cs typeface="Calibri" pitchFamily="34" charset="-120"/>
-              </a:rPr>
-              <a:t>22.5%</a:t>
-            </a:r>
-            <a:endParaRPr lang="en-US" sz="3400" dirty="0"/>
-          </a:p>
-        </p:txBody>
-      </p:sp>
-      <p:sp>
-        <p:nvSpPr>
-          <p:cNvPr id="22" name="Text 20"/>
-          <p:cNvSpPr/>
-          <p:nvPr/>
-        </p:nvSpPr>
-        <p:spPr>
-          <a:xfrm>
-            <a:off x="9281160" y="2834640"/>
-            <a:ext cx="2560320" cy="640080"/>
+            <a:pPr marL="0" indent="0" algn="ctr">
+              <a:buNone/>
+            </a:pPr>
+            <a:r>
+              <a:rPr lang="en-US" sz="2000" b="1" dirty="0">
+                <a:solidFill>
+                  <a:srgbClr val="C89728"/>
+                </a:solidFill>
+                <a:latin typeface="Calibri" pitchFamily="34" charset="0"/>
+                <a:ea typeface="Calibri" pitchFamily="34" charset="-122"/>
+                <a:cs typeface="Calibri" pitchFamily="34" charset="-120"/>
+              </a:rPr>
+              <a:t>→</a:t>
+            </a:r>
+            <a:endParaRPr lang="en-US" sz="2000" dirty="0"/>
+          </a:p>
+        </p:txBody>
+      </p:sp>
+      <p:sp>
+        <p:nvSpPr>
+          <p:cNvPr id="29" name="Text 27"/>
+          <p:cNvSpPr/>
+          <p:nvPr/>
+        </p:nvSpPr>
+        <p:spPr>
+          <a:xfrm>
+            <a:off x="8119872" y="3063240"/>
+            <a:ext cx="292608" cy="411480"/>
           </a:xfrm>
           <a:prstGeom prst="rect">
             <a:avLst/>
@@ -18643,90 +19650,34 @@
           <a:bodyPr wrap="square" rtlCol="0" anchor="ctr"/>
           <a:lstStyle/>
           <a:p>
-            <a:pPr marL="0" indent="0">
-              <a:buNone/>
-            </a:pPr>
-            <a:r>
-              <a:rPr lang="en-US" sz="1050" dirty="0">
-                <a:solidFill>
-                  <a:srgbClr val="F4A5A8"/>
-                </a:solidFill>
-                <a:latin typeface="Calibri" pitchFamily="34" charset="0"/>
-                <a:ea typeface="Calibri" pitchFamily="34" charset="-122"/>
-                <a:cs typeface="Calibri" pitchFamily="34" charset="-120"/>
-              </a:rPr>
-              <a:t>simulated failure rate</a:t>
-            </a:r>
-            <a:endParaRPr lang="en-US" sz="1050" dirty="0"/>
-          </a:p>
-          <a:p>
-            <a:pPr marL="0" indent="0">
-              <a:buNone/>
-            </a:pPr>
-            <a:r>
-              <a:rPr lang="en-US" sz="1050" dirty="0">
-                <a:solidFill>
-                  <a:srgbClr val="F4A5A8"/>
-                </a:solidFill>
-                <a:latin typeface="Calibri" pitchFamily="34" charset="0"/>
-                <a:ea typeface="Calibri" pitchFamily="34" charset="-122"/>
-                <a:cs typeface="Calibri" pitchFamily="34" charset="-120"/>
-              </a:rPr>
-              <a:t>at 2008 crisis severity</a:t>
-            </a:r>
-            <a:endParaRPr lang="en-US" sz="1050" dirty="0"/>
-          </a:p>
-        </p:txBody>
-      </p:sp>
-      <p:sp>
-        <p:nvSpPr>
-          <p:cNvPr id="23" name="Text 21"/>
-          <p:cNvSpPr/>
-          <p:nvPr/>
-        </p:nvSpPr>
-        <p:spPr>
-          <a:xfrm>
-            <a:off x="7086600" y="3456432"/>
-            <a:ext cx="4846320" cy="438912"/>
-          </a:xfrm>
-          <a:prstGeom prst="rect">
-            <a:avLst/>
-          </a:prstGeom>
-          <a:noFill/>
-          <a:ln/>
-        </p:spPr>
-        <p:txBody>
-          <a:bodyPr wrap="square" rtlCol="0" anchor="ctr"/>
-          <a:lstStyle/>
-          <a:p>
-            <a:pPr marL="0" indent="0">
-              <a:buNone/>
-            </a:pPr>
-            <a:r>
-              <a:rPr lang="en-US" sz="950" dirty="0">
-                <a:solidFill>
-                  <a:srgbClr val="F4A5A8"/>
-                </a:solidFill>
-                <a:latin typeface="Calibri" pitchFamily="34" charset="0"/>
-                <a:ea typeface="Calibri" pitchFamily="34" charset="-122"/>
-                <a:cs typeface="Calibri" pitchFamily="34" charset="-120"/>
-              </a:rPr>
-              <a:t>+3.4 percentage points higher — approximately 24 additional institutions representing roughly $14 billion in assets each.</a:t>
-            </a:r>
-            <a:endParaRPr lang="en-US" sz="950" dirty="0"/>
-          </a:p>
-        </p:txBody>
-      </p:sp>
-      <p:sp>
-        <p:nvSpPr>
-          <p:cNvPr id="24" name="Shape 22"/>
-          <p:cNvSpPr/>
-          <p:nvPr/>
-        </p:nvSpPr>
-        <p:spPr>
-          <a:xfrm>
-            <a:off x="1691640" y="4069080"/>
-            <a:ext cx="10195560" cy="804672"/>
+            <a:pPr marL="0" indent="0" algn="ctr">
+              <a:buNone/>
+            </a:pPr>
+            <a:r>
+              <a:rPr lang="en-US" sz="2000" b="1" dirty="0">
+                <a:solidFill>
+                  <a:srgbClr val="C89728"/>
+                </a:solidFill>
+                <a:latin typeface="Calibri" pitchFamily="34" charset="0"/>
+                <a:ea typeface="Calibri" pitchFamily="34" charset="-122"/>
+                <a:cs typeface="Calibri" pitchFamily="34" charset="-120"/>
+              </a:rPr>
+              <a:t>→</a:t>
+            </a:r>
+            <a:endParaRPr lang="en-US" sz="2000" dirty="0"/>
+          </a:p>
+        </p:txBody>
+      </p:sp>
+      <p:sp>
+        <p:nvSpPr>
+          <p:cNvPr id="30" name="Shape 28"/>
+          <p:cNvSpPr/>
+          <p:nvPr/>
+        </p:nvSpPr>
+        <p:spPr>
+          <a:xfrm>
+            <a:off x="1691640" y="4343400"/>
+            <a:ext cx="10195560" cy="868680"/>
           </a:xfrm>
           <a:prstGeom prst="rect">
             <a:avLst/>
@@ -18751,14 +19702,14 @@
       </p:sp>
       <p:sp>
         <p:nvSpPr>
-          <p:cNvPr id="25" name="Shape 23"/>
-          <p:cNvSpPr/>
-          <p:nvPr/>
-        </p:nvSpPr>
-        <p:spPr>
-          <a:xfrm>
-            <a:off x="1691640" y="4069080"/>
-            <a:ext cx="64008" cy="804672"/>
+          <p:cNvPr id="31" name="Shape 29"/>
+          <p:cNvSpPr/>
+          <p:nvPr/>
+        </p:nvSpPr>
+        <p:spPr>
+          <a:xfrm>
+            <a:off x="1691640" y="4343400"/>
+            <a:ext cx="64008" cy="868680"/>
           </a:xfrm>
           <a:prstGeom prst="rect">
             <a:avLst/>
@@ -18783,14 +19734,14 @@
       </p:sp>
       <p:sp>
         <p:nvSpPr>
-          <p:cNvPr id="26" name="Text 24"/>
-          <p:cNvSpPr/>
-          <p:nvPr/>
-        </p:nvSpPr>
-        <p:spPr>
-          <a:xfrm>
-            <a:off x="1828800" y="4114800"/>
-            <a:ext cx="9994392" cy="713232"/>
+          <p:cNvPr id="32" name="Text 30"/>
+          <p:cNvSpPr/>
+          <p:nvPr/>
+        </p:nvSpPr>
+        <p:spPr>
+          <a:xfrm>
+            <a:off x="1828800" y="4389120"/>
+            <a:ext cx="9994392" cy="777240"/>
           </a:xfrm>
           <a:prstGeom prst="rect">
             <a:avLst/>
@@ -18814,7 +19765,7 @@
                 <a:ea typeface="Calibri" pitchFamily="34" charset="-122"/>
                 <a:cs typeface="Calibri" pitchFamily="34" charset="-120"/>
               </a:rPr>
-              <a:t>Context: Both the pre-rule (19.1%) and with-rule (19.4%) failure rates are similar because complex credit unions were already accumulating capital buffers before the rule came into effect. The rule added relatively little on top of what was already happening. The 22.5% figure shows what would happen if those rule-induced buffers were fully unwound.</a:t>
+              <a:t>How can capital building be hard (RQ2) yet already happening (RQ5)? They measure different things. RQ2 = compliance capital (clearing the new 10% risk-weighted bar, which many institutions struggled to reach). RQ5 = absolute net worth (which was trending up organically as CUs grew their balance sheets regardless of the rule). The rule raised the compliance bar faster than institutions could clear it — but absolute capital was still rising, keeping Scenarios 1 and 2 close.</a:t>
             </a:r>
             <a:endParaRPr lang="en-US" sz="1050" dirty="0"/>
           </a:p>
@@ -18822,13 +19773,13 @@
       </p:sp>
       <p:sp>
         <p:nvSpPr>
-          <p:cNvPr id="27" name="Text 25"/>
-          <p:cNvSpPr/>
-          <p:nvPr/>
-        </p:nvSpPr>
-        <p:spPr>
-          <a:xfrm>
-            <a:off x="1691640" y="4983480"/>
+          <p:cNvPr id="33" name="Text 31"/>
+          <p:cNvSpPr/>
+          <p:nvPr/>
+        </p:nvSpPr>
+        <p:spPr>
+          <a:xfrm>
+            <a:off x="1691640" y="4919472"/>
             <a:ext cx="4572000" cy="201168"/>
           </a:xfrm>
           <a:prstGeom prst="rect">
@@ -18853,7 +19804,131 @@
                 <a:ea typeface="Calibri" pitchFamily="34" charset="-122"/>
                 <a:cs typeface="Calibri" pitchFamily="34" charset="-120"/>
               </a:rPr>
-              <a:t>ADDITIONAL FINANCIAL STABILITY INSIGHTS</a:t>
+              <a:t>ADDITIONAL CONTEXT</a:t>
+            </a:r>
+            <a:endParaRPr lang="en-US" sz="900" dirty="0"/>
+          </a:p>
+        </p:txBody>
+      </p:sp>
+      <p:sp>
+        <p:nvSpPr>
+          <p:cNvPr id="34" name="Text 32"/>
+          <p:cNvSpPr/>
+          <p:nvPr/>
+        </p:nvSpPr>
+        <p:spPr>
+          <a:xfrm>
+            <a:off x="1691640" y="5120640"/>
+            <a:ext cx="7315200" cy="1481328"/>
+          </a:xfrm>
+          <a:prstGeom prst="rect">
+            <a:avLst/>
+          </a:prstGeom>
+          <a:noFill/>
+          <a:ln/>
+        </p:spPr>
+        <p:txBody>
+          <a:bodyPr wrap="square" rtlCol="0" anchor="t"/>
+          <a:lstStyle/>
+          <a:p>
+            <a:pPr marL="342900" indent="-342900">
+              <a:spcAft>
+                <a:spcPts val="300"/>
+              </a:spcAft>
+              <a:buSzPct val="100000"/>
+              <a:buChar char="•"/>
+            </a:pPr>
+            <a:r>
+              <a:rPr lang="en-US" sz="1150" dirty="0">
+                <a:solidFill>
+                  <a:srgbClr val="1C1C1C"/>
+                </a:solidFill>
+                <a:latin typeface="Calibri" pitchFamily="34" charset="0"/>
+                <a:ea typeface="Calibri" pitchFamily="34" charset="-122"/>
+                <a:cs typeface="Calibri" pitchFamily="34" charset="-120"/>
+              </a:rPr>
+              <a:t>Capital built regardless: during the 2008 crisis, complex CUs built capital faster than non-complex CUs even without a formal capital rule — suggesting organic incentives were already operating</a:t>
+            </a:r>
+            <a:endParaRPr lang="en-US" sz="1150" dirty="0"/>
+          </a:p>
+          <a:p>
+            <a:pPr marL="342900" indent="-342900">
+              <a:spcAft>
+                <a:spcPts val="300"/>
+              </a:spcAft>
+              <a:buSzPct val="100000"/>
+              <a:buChar char="•"/>
+            </a:pPr>
+            <a:r>
+              <a:rPr lang="en-US" sz="1150" dirty="0">
+                <a:solidFill>
+                  <a:srgbClr val="1C1C1C"/>
+                </a:solidFill>
+                <a:latin typeface="Calibri" pitchFamily="34" charset="0"/>
+                <a:ea typeface="Calibri" pitchFamily="34" charset="-122"/>
+                <a:cs typeface="Calibri" pitchFamily="34" charset="-120"/>
+              </a:rPr>
+              <a:t>Portfolio risk shifted: the move from auto loans toward commercial real estate may have increased sensitivity to property market stress, partially offsetting the rule’s prudential benefit</a:t>
+            </a:r>
+            <a:endParaRPr lang="en-US" sz="1150" dirty="0"/>
+          </a:p>
+          <a:p>
+            <a:pPr marL="342900" indent="-342900">
+              <a:spcAft>
+                <a:spcPts val="300"/>
+              </a:spcAft>
+              <a:buSzPct val="100000"/>
+              <a:buChar char="•"/>
+            </a:pPr>
+            <a:r>
+              <a:rPr lang="en-US" sz="1150" dirty="0">
+                <a:solidFill>
+                  <a:srgbClr val="1C1C1C"/>
+                </a:solidFill>
+                <a:latin typeface="Calibri" pitchFamily="34" charset="0"/>
+                <a:ea typeface="Calibri" pitchFamily="34" charset="-122"/>
+                <a:cs typeface="Calibri" pitchFamily="34" charset="-120"/>
+              </a:rPr>
+              <a:t>Protection scales with severity: the rule’s value grows meaningfully in stress scenarios more severe than 2008 — its marginal benefit increases as tail risk increases</a:t>
+            </a:r>
+            <a:endParaRPr lang="en-US" sz="1150" dirty="0"/>
+          </a:p>
+        </p:txBody>
+      </p:sp>
+      <p:sp>
+        <p:nvSpPr>
+          <p:cNvPr id="35" name="Text 33"/>
+          <p:cNvSpPr/>
+          <p:nvPr/>
+        </p:nvSpPr>
+        <p:spPr>
+          <a:xfrm>
+            <a:off x="9144000" y="4919472"/>
+            <a:ext cx="4572000" cy="201168"/>
+          </a:xfrm>
+          <a:prstGeom prst="rect">
+            <a:avLst/>
+          </a:prstGeom>
+          <a:noFill/>
+          <a:ln/>
+        </p:spPr>
+        <p:txBody>
+          <a:bodyPr wrap="square" rtlCol="0" anchor="ctr"/>
+          <a:lstStyle/>
+          <a:p>
+            <a:pPr marL="0" indent="0">
+              <a:buNone/>
+            </a:pPr>
+            <a:r>
+              <a:rPr lang="en-US" sz="900" b="1" kern="0" spc="150" dirty="0">
+                <a:solidFill>
+                  <a:srgbClr val="C89728"/>
+                </a:solidFill>
+                <a:latin typeface="Calibri" pitchFamily="34" charset="0"/>
+                <a:ea typeface="Calibri" pitchFamily="34" charset="-122"/>
+                <a:cs typeface="Calibri" pitchFamily="34" charset="-120"/>
+              </a:rPr>
+              <a:t>ALL THREE SCENARIOS AT 2008 SEVERITY</a:t>
             </a:r>
             <a:endParaRPr lang="en-US" sz="900" dirty="0"/>
           </a:p>
@@ -18861,666 +19936,13 @@
       </p:sp>
       <p:graphicFrame>
         <p:nvGraphicFramePr>
-          <p:cNvPr id="28" name="Table 0"/>
-          <p:cNvGraphicFramePr>
-            <a:graphicFrameLocks noGrp="1"/>
-          </p:cNvGraphicFramePr>
-          <p:nvPr>
-            <p:extLst>
-              <p:ext uri="{D42A27DB-BD31-4B8C-83A1-F6EECF244321}">
-                <p14:modId xmlns:p14="http://schemas.microsoft.com/office/powerpoint/2010/main" val="1579011935"/>
-              </p:ext>
-            </p:extLst>
-          </p:nvPr>
+          <p:cNvPr id="36" name="Chart 0"/>
+          <p:cNvGraphicFramePr/>
+          <p:nvPr/>
         </p:nvGraphicFramePr>
         <p:xfrm>
-          <a:off x="1691640" y="5193792"/>
-          <a:ext cx="7315200" cy="1371600"/>
-        </p:xfrm>
-        <a:graphic>
-          <a:graphicData uri="http://schemas.openxmlformats.org/drawingml/2006/table">
-            <a:tbl>
-              <a:tblPr/>
-              <a:tblGrid>
-                <a:gridCol w="2011680">
-                  <a:extLst>
-                    <a:ext uri="{9D8B030D-6E8A-4147-A177-3AD203B41FA5}">
-                      <a16:colId xmlns:a16="http://schemas.microsoft.com/office/drawing/2014/main" val="20000"/>
-                    </a:ext>
-                  </a:extLst>
-                </a:gridCol>
-                <a:gridCol w="5303520">
-                  <a:extLst>
-                    <a:ext uri="{9D8B030D-6E8A-4147-A177-3AD203B41FA5}">
-                      <a16:colId xmlns:a16="http://schemas.microsoft.com/office/drawing/2014/main" val="20001"/>
-                    </a:ext>
-                  </a:extLst>
-                </a:gridCol>
-              </a:tblGrid>
-              <a:tr h="342900">
-                <a:tc>
-                  <a:txBody>
-                    <a:bodyPr/>
-                    <a:lstStyle/>
-                    <a:p>
-                      <a:pPr marL="0" indent="0">
-                        <a:buNone/>
-                      </a:pPr>
-                      <a:r>
-                        <a:rPr lang="en-US" sz="1050" b="1" dirty="0">
-                          <a:solidFill>
-                            <a:srgbClr val="FFFFFF"/>
-                          </a:solidFill>
-                          <a:latin typeface="Calibri" pitchFamily="34" charset="0"/>
-                          <a:ea typeface="Calibri" pitchFamily="34" charset="-122"/>
-                          <a:cs typeface="Calibri" pitchFamily="34" charset="-120"/>
-                        </a:rPr>
-                        <a:t>Finding</a:t>
-                      </a:r>
-                      <a:endParaRPr lang="en-US" sz="1050" dirty="0">
-                        <a:latin typeface="Calibri" charset="0"/>
-                        <a:ea typeface="Calibri" charset="0"/>
-                        <a:cs typeface="Calibri" charset="0"/>
-                      </a:endParaRPr>
-                    </a:p>
-                  </a:txBody>
-                  <a:tcPr>
-                    <a:lnL w="6350" cap="flat" cmpd="sng" algn="ctr">
-                      <a:solidFill>
-                        <a:srgbClr val="DDDDDD"/>
-                      </a:solidFill>
-                      <a:prstDash val="solid"/>
-                      <a:round/>
-                      <a:headEnd type="none" w="med" len="med"/>
-                      <a:tailEnd type="none" w="med" len="med"/>
-                    </a:lnL>
-                    <a:lnR w="6350" cap="flat" cmpd="sng" algn="ctr">
-                      <a:solidFill>
-                        <a:srgbClr val="DDDDDD"/>
-                      </a:solidFill>
-                      <a:prstDash val="solid"/>
-                      <a:round/>
-                      <a:headEnd type="none" w="med" len="med"/>
-                      <a:tailEnd type="none" w="med" len="med"/>
-                    </a:lnR>
-                    <a:lnT w="6350" cap="flat" cmpd="sng" algn="ctr">
-                      <a:solidFill>
-                        <a:srgbClr val="DDDDDD"/>
-                      </a:solidFill>
-                      <a:prstDash val="solid"/>
-                      <a:round/>
-                      <a:headEnd type="none" w="med" len="med"/>
-                      <a:tailEnd type="none" w="med" len="med"/>
-                    </a:lnT>
-                    <a:lnB w="6350" cap="flat" cmpd="sng" algn="ctr">
-                      <a:solidFill>
-                        <a:srgbClr val="DDDDDD"/>
-                      </a:solidFill>
-                      <a:prstDash val="solid"/>
-                      <a:round/>
-                      <a:headEnd type="none" w="med" len="med"/>
-                      <a:tailEnd type="none" w="med" len="med"/>
-                    </a:lnB>
-                    <a:solidFill>
-                      <a:srgbClr val="1A2744"/>
-                    </a:solidFill>
-                  </a:tcPr>
-                </a:tc>
-                <a:tc>
-                  <a:txBody>
-                    <a:bodyPr/>
-                    <a:lstStyle/>
-                    <a:p>
-                      <a:pPr marL="0" indent="0">
-                        <a:buNone/>
-                      </a:pPr>
-                      <a:r>
-                        <a:rPr lang="en-US" sz="1050" b="1" dirty="0">
-                          <a:solidFill>
-                            <a:srgbClr val="FFFFFF"/>
-                          </a:solidFill>
-                          <a:latin typeface="Calibri" pitchFamily="34" charset="0"/>
-                          <a:ea typeface="Calibri" pitchFamily="34" charset="-122"/>
-                          <a:cs typeface="Calibri" pitchFamily="34" charset="-120"/>
-                        </a:rPr>
-                        <a:t>Detail</a:t>
-                      </a:r>
-                      <a:endParaRPr lang="en-US" sz="1050" dirty="0">
-                        <a:latin typeface="Calibri" charset="0"/>
-                        <a:ea typeface="Calibri" charset="0"/>
-                        <a:cs typeface="Calibri" charset="0"/>
-                      </a:endParaRPr>
-                    </a:p>
-                  </a:txBody>
-                  <a:tcPr>
-                    <a:lnL w="6350" cap="flat" cmpd="sng" algn="ctr">
-                      <a:solidFill>
-                        <a:srgbClr val="DDDDDD"/>
-                      </a:solidFill>
-                      <a:prstDash val="solid"/>
-                      <a:round/>
-                      <a:headEnd type="none" w="med" len="med"/>
-                      <a:tailEnd type="none" w="med" len="med"/>
-                    </a:lnL>
-                    <a:lnR w="6350" cap="flat" cmpd="sng" algn="ctr">
-                      <a:solidFill>
-                        <a:srgbClr val="DDDDDD"/>
-                      </a:solidFill>
-                      <a:prstDash val="solid"/>
-                      <a:round/>
-                      <a:headEnd type="none" w="med" len="med"/>
-                      <a:tailEnd type="none" w="med" len="med"/>
-                    </a:lnR>
-                    <a:lnT w="6350" cap="flat" cmpd="sng" algn="ctr">
-                      <a:solidFill>
-                        <a:srgbClr val="DDDDDD"/>
-                      </a:solidFill>
-                      <a:prstDash val="solid"/>
-                      <a:round/>
-                      <a:headEnd type="none" w="med" len="med"/>
-                      <a:tailEnd type="none" w="med" len="med"/>
-                    </a:lnT>
-                    <a:lnB w="6350" cap="flat" cmpd="sng" algn="ctr">
-                      <a:solidFill>
-                        <a:srgbClr val="DDDDDD"/>
-                      </a:solidFill>
-                      <a:prstDash val="solid"/>
-                      <a:round/>
-                      <a:headEnd type="none" w="med" len="med"/>
-                      <a:tailEnd type="none" w="med" len="med"/>
-                    </a:lnB>
-                    <a:solidFill>
-                      <a:srgbClr val="1A2744"/>
-                    </a:solidFill>
-                  </a:tcPr>
-                </a:tc>
-                <a:extLst>
-                  <a:ext uri="{0D108BD9-81ED-4DB2-BD59-A6C34878D82A}">
-                    <a16:rowId xmlns:a16="http://schemas.microsoft.com/office/drawing/2014/main" val="10000"/>
-                  </a:ext>
-                </a:extLst>
-              </a:tr>
-              <a:tr h="342900">
-                <a:tc>
-                  <a:txBody>
-                    <a:bodyPr/>
-                    <a:lstStyle/>
-                    <a:p>
-                      <a:pPr marL="0" indent="0">
-                        <a:buNone/>
-                      </a:pPr>
-                      <a:r>
-                        <a:rPr lang="en-US" sz="1050" dirty="0">
-                          <a:solidFill>
-                            <a:srgbClr val="000000"/>
-                          </a:solidFill>
-                          <a:latin typeface="Calibri" pitchFamily="34" charset="0"/>
-                          <a:ea typeface="Calibri" pitchFamily="34" charset="-122"/>
-                          <a:cs typeface="Calibri" pitchFamily="34" charset="-120"/>
-                        </a:rPr>
-                        <a:t>Capital built regardless</a:t>
-                      </a:r>
-                      <a:endParaRPr lang="en-US" sz="1050" dirty="0">
-                        <a:latin typeface="Calibri" charset="0"/>
-                        <a:ea typeface="Calibri" charset="0"/>
-                        <a:cs typeface="Calibri" charset="0"/>
-                      </a:endParaRPr>
-                    </a:p>
-                  </a:txBody>
-                  <a:tcPr>
-                    <a:lnL w="6350" cap="flat" cmpd="sng" algn="ctr">
-                      <a:solidFill>
-                        <a:srgbClr val="DDDDDD"/>
-                      </a:solidFill>
-                      <a:prstDash val="solid"/>
-                      <a:round/>
-                      <a:headEnd type="none" w="med" len="med"/>
-                      <a:tailEnd type="none" w="med" len="med"/>
-                    </a:lnL>
-                    <a:lnR w="6350" cap="flat" cmpd="sng" algn="ctr">
-                      <a:solidFill>
-                        <a:srgbClr val="DDDDDD"/>
-                      </a:solidFill>
-                      <a:prstDash val="solid"/>
-                      <a:round/>
-                      <a:headEnd type="none" w="med" len="med"/>
-                      <a:tailEnd type="none" w="med" len="med"/>
-                    </a:lnR>
-                    <a:lnT w="6350" cap="flat" cmpd="sng" algn="ctr">
-                      <a:solidFill>
-                        <a:srgbClr val="DDDDDD"/>
-                      </a:solidFill>
-                      <a:prstDash val="solid"/>
-                      <a:round/>
-                      <a:headEnd type="none" w="med" len="med"/>
-                      <a:tailEnd type="none" w="med" len="med"/>
-                    </a:lnT>
-                    <a:lnB w="6350" cap="flat" cmpd="sng" algn="ctr">
-                      <a:solidFill>
-                        <a:srgbClr val="DDDDDD"/>
-                      </a:solidFill>
-                      <a:prstDash val="solid"/>
-                      <a:round/>
-                      <a:headEnd type="none" w="med" len="med"/>
-                      <a:tailEnd type="none" w="med" len="med"/>
-                    </a:lnB>
-                    <a:solidFill>
-                      <a:srgbClr val="FFFFFF"/>
-                    </a:solidFill>
-                  </a:tcPr>
-                </a:tc>
-                <a:tc>
-                  <a:txBody>
-                    <a:bodyPr/>
-                    <a:lstStyle/>
-                    <a:p>
-                      <a:pPr marL="0" indent="0">
-                        <a:buNone/>
-                      </a:pPr>
-                      <a:r>
-                        <a:rPr lang="en-US" sz="1050" dirty="0">
-                          <a:solidFill>
-                            <a:srgbClr val="000000"/>
-                          </a:solidFill>
-                          <a:latin typeface="Calibri" pitchFamily="34" charset="0"/>
-                          <a:ea typeface="Calibri" pitchFamily="34" charset="-122"/>
-                          <a:cs typeface="Calibri" pitchFamily="34" charset="-120"/>
-                        </a:rPr>
-                        <a:t>During the 2008 crisis, complex CUs built capital faster than non-complex CUs even without a formal capital rule in place</a:t>
-                      </a:r>
-                      <a:endParaRPr lang="en-US" sz="1050" dirty="0">
-                        <a:latin typeface="Calibri" charset="0"/>
-                        <a:ea typeface="Calibri" charset="0"/>
-                        <a:cs typeface="Calibri" charset="0"/>
-                      </a:endParaRPr>
-                    </a:p>
-                  </a:txBody>
-                  <a:tcPr>
-                    <a:lnL w="6350" cap="flat" cmpd="sng" algn="ctr">
-                      <a:solidFill>
-                        <a:srgbClr val="DDDDDD"/>
-                      </a:solidFill>
-                      <a:prstDash val="solid"/>
-                      <a:round/>
-                      <a:headEnd type="none" w="med" len="med"/>
-                      <a:tailEnd type="none" w="med" len="med"/>
-                    </a:lnL>
-                    <a:lnR w="6350" cap="flat" cmpd="sng" algn="ctr">
-                      <a:solidFill>
-                        <a:srgbClr val="DDDDDD"/>
-                      </a:solidFill>
-                      <a:prstDash val="solid"/>
-                      <a:round/>
-                      <a:headEnd type="none" w="med" len="med"/>
-                      <a:tailEnd type="none" w="med" len="med"/>
-                    </a:lnR>
-                    <a:lnT w="6350" cap="flat" cmpd="sng" algn="ctr">
-                      <a:solidFill>
-                        <a:srgbClr val="DDDDDD"/>
-                      </a:solidFill>
-                      <a:prstDash val="solid"/>
-                      <a:round/>
-                      <a:headEnd type="none" w="med" len="med"/>
-                      <a:tailEnd type="none" w="med" len="med"/>
-                    </a:lnT>
-                    <a:lnB w="6350" cap="flat" cmpd="sng" algn="ctr">
-                      <a:solidFill>
-                        <a:srgbClr val="DDDDDD"/>
-                      </a:solidFill>
-                      <a:prstDash val="solid"/>
-                      <a:round/>
-                      <a:headEnd type="none" w="med" len="med"/>
-                      <a:tailEnd type="none" w="med" len="med"/>
-                    </a:lnB>
-                    <a:solidFill>
-                      <a:srgbClr val="FFFFFF"/>
-                    </a:solidFill>
-                  </a:tcPr>
-                </a:tc>
-                <a:extLst>
-                  <a:ext uri="{0D108BD9-81ED-4DB2-BD59-A6C34878D82A}">
-                    <a16:rowId xmlns:a16="http://schemas.microsoft.com/office/drawing/2014/main" val="10001"/>
-                  </a:ext>
-                </a:extLst>
-              </a:tr>
-              <a:tr h="342900">
-                <a:tc>
-                  <a:txBody>
-                    <a:bodyPr/>
-                    <a:lstStyle/>
-                    <a:p>
-                      <a:pPr marL="0" indent="0">
-                        <a:buNone/>
-                      </a:pPr>
-                      <a:r>
-                        <a:rPr lang="en-US" sz="1050" dirty="0">
-                          <a:solidFill>
-                            <a:srgbClr val="000000"/>
-                          </a:solidFill>
-                          <a:latin typeface="Calibri" pitchFamily="34" charset="0"/>
-                          <a:ea typeface="Calibri" pitchFamily="34" charset="-122"/>
-                          <a:cs typeface="Calibri" pitchFamily="34" charset="-120"/>
-                        </a:rPr>
-                        <a:t>Portfolio risk shifted</a:t>
-                      </a:r>
-                      <a:endParaRPr lang="en-US" sz="1050" dirty="0">
-                        <a:latin typeface="Calibri" charset="0"/>
-                        <a:ea typeface="Calibri" charset="0"/>
-                        <a:cs typeface="Calibri" charset="0"/>
-                      </a:endParaRPr>
-                    </a:p>
-                  </a:txBody>
-                  <a:tcPr>
-                    <a:lnL w="6350" cap="flat" cmpd="sng" algn="ctr">
-                      <a:solidFill>
-                        <a:srgbClr val="DDDDDD"/>
-                      </a:solidFill>
-                      <a:prstDash val="solid"/>
-                      <a:round/>
-                      <a:headEnd type="none" w="med" len="med"/>
-                      <a:tailEnd type="none" w="med" len="med"/>
-                    </a:lnL>
-                    <a:lnR w="6350" cap="flat" cmpd="sng" algn="ctr">
-                      <a:solidFill>
-                        <a:srgbClr val="DDDDDD"/>
-                      </a:solidFill>
-                      <a:prstDash val="solid"/>
-                      <a:round/>
-                      <a:headEnd type="none" w="med" len="med"/>
-                      <a:tailEnd type="none" w="med" len="med"/>
-                    </a:lnR>
-                    <a:lnT w="6350" cap="flat" cmpd="sng" algn="ctr">
-                      <a:solidFill>
-                        <a:srgbClr val="DDDDDD"/>
-                      </a:solidFill>
-                      <a:prstDash val="solid"/>
-                      <a:round/>
-                      <a:headEnd type="none" w="med" len="med"/>
-                      <a:tailEnd type="none" w="med" len="med"/>
-                    </a:lnT>
-                    <a:lnB w="6350" cap="flat" cmpd="sng" algn="ctr">
-                      <a:solidFill>
-                        <a:srgbClr val="DDDDDD"/>
-                      </a:solidFill>
-                      <a:prstDash val="solid"/>
-                      <a:round/>
-                      <a:headEnd type="none" w="med" len="med"/>
-                      <a:tailEnd type="none" w="med" len="med"/>
-                    </a:lnB>
-                    <a:solidFill>
-                      <a:srgbClr val="FFFFFF"/>
-                    </a:solidFill>
-                  </a:tcPr>
-                </a:tc>
-                <a:tc>
-                  <a:txBody>
-                    <a:bodyPr/>
-                    <a:lstStyle/>
-                    <a:p>
-                      <a:pPr marL="0" indent="0">
-                        <a:buNone/>
-                      </a:pPr>
-                      <a:r>
-                        <a:rPr lang="en-US" sz="1050" dirty="0">
-                          <a:solidFill>
-                            <a:srgbClr val="000000"/>
-                          </a:solidFill>
-                          <a:latin typeface="Calibri" pitchFamily="34" charset="0"/>
-                          <a:ea typeface="Calibri" pitchFamily="34" charset="-122"/>
-                          <a:cs typeface="Calibri" pitchFamily="34" charset="-120"/>
-                        </a:rPr>
-                        <a:t>The shift from auto loans to commercial real estate may have increased complex CU sensitivity to property market stress</a:t>
-                      </a:r>
-                      <a:endParaRPr lang="en-US" sz="1050" dirty="0">
-                        <a:latin typeface="Calibri" charset="0"/>
-                        <a:ea typeface="Calibri" charset="0"/>
-                        <a:cs typeface="Calibri" charset="0"/>
-                      </a:endParaRPr>
-                    </a:p>
-                  </a:txBody>
-                  <a:tcPr>
-                    <a:lnL w="6350" cap="flat" cmpd="sng" algn="ctr">
-                      <a:solidFill>
-                        <a:srgbClr val="DDDDDD"/>
-                      </a:solidFill>
-                      <a:prstDash val="solid"/>
-                      <a:round/>
-                      <a:headEnd type="none" w="med" len="med"/>
-                      <a:tailEnd type="none" w="med" len="med"/>
-                    </a:lnL>
-                    <a:lnR w="6350" cap="flat" cmpd="sng" algn="ctr">
-                      <a:solidFill>
-                        <a:srgbClr val="DDDDDD"/>
-                      </a:solidFill>
-                      <a:prstDash val="solid"/>
-                      <a:round/>
-                      <a:headEnd type="none" w="med" len="med"/>
-                      <a:tailEnd type="none" w="med" len="med"/>
-                    </a:lnR>
-                    <a:lnT w="6350" cap="flat" cmpd="sng" algn="ctr">
-                      <a:solidFill>
-                        <a:srgbClr val="DDDDDD"/>
-                      </a:solidFill>
-                      <a:prstDash val="solid"/>
-                      <a:round/>
-                      <a:headEnd type="none" w="med" len="med"/>
-                      <a:tailEnd type="none" w="med" len="med"/>
-                    </a:lnT>
-                    <a:lnB w="6350" cap="flat" cmpd="sng" algn="ctr">
-                      <a:solidFill>
-                        <a:srgbClr val="DDDDDD"/>
-                      </a:solidFill>
-                      <a:prstDash val="solid"/>
-                      <a:round/>
-                      <a:headEnd type="none" w="med" len="med"/>
-                      <a:tailEnd type="none" w="med" len="med"/>
-                    </a:lnB>
-                    <a:solidFill>
-                      <a:srgbClr val="FFFFFF"/>
-                    </a:solidFill>
-                  </a:tcPr>
-                </a:tc>
-                <a:extLst>
-                  <a:ext uri="{0D108BD9-81ED-4DB2-BD59-A6C34878D82A}">
-                    <a16:rowId xmlns:a16="http://schemas.microsoft.com/office/drawing/2014/main" val="10002"/>
-                  </a:ext>
-                </a:extLst>
-              </a:tr>
-              <a:tr h="342900">
-                <a:tc>
-                  <a:txBody>
-                    <a:bodyPr/>
-                    <a:lstStyle/>
-                    <a:p>
-                      <a:pPr marL="0" indent="0">
-                        <a:buNone/>
-                      </a:pPr>
-                      <a:r>
-                        <a:rPr lang="en-US" sz="1050" dirty="0">
-                          <a:solidFill>
-                            <a:srgbClr val="000000"/>
-                          </a:solidFill>
-                          <a:latin typeface="Calibri" pitchFamily="34" charset="0"/>
-                          <a:ea typeface="Calibri" pitchFamily="34" charset="-122"/>
-                          <a:cs typeface="Calibri" pitchFamily="34" charset="-120"/>
-                        </a:rPr>
-                        <a:t>Rule’s value grows under severity</a:t>
-                      </a:r>
-                      <a:endParaRPr lang="en-US" sz="1050" dirty="0">
-                        <a:latin typeface="Calibri" charset="0"/>
-                        <a:ea typeface="Calibri" charset="0"/>
-                        <a:cs typeface="Calibri" charset="0"/>
-                      </a:endParaRPr>
-                    </a:p>
-                  </a:txBody>
-                  <a:tcPr>
-                    <a:lnL w="6350" cap="flat" cmpd="sng" algn="ctr">
-                      <a:solidFill>
-                        <a:srgbClr val="DDDDDD"/>
-                      </a:solidFill>
-                      <a:prstDash val="solid"/>
-                      <a:round/>
-                      <a:headEnd type="none" w="med" len="med"/>
-                      <a:tailEnd type="none" w="med" len="med"/>
-                    </a:lnL>
-                    <a:lnR w="6350" cap="flat" cmpd="sng" algn="ctr">
-                      <a:solidFill>
-                        <a:srgbClr val="DDDDDD"/>
-                      </a:solidFill>
-                      <a:prstDash val="solid"/>
-                      <a:round/>
-                      <a:headEnd type="none" w="med" len="med"/>
-                      <a:tailEnd type="none" w="med" len="med"/>
-                    </a:lnR>
-                    <a:lnT w="6350" cap="flat" cmpd="sng" algn="ctr">
-                      <a:solidFill>
-                        <a:srgbClr val="DDDDDD"/>
-                      </a:solidFill>
-                      <a:prstDash val="solid"/>
-                      <a:round/>
-                      <a:headEnd type="none" w="med" len="med"/>
-                      <a:tailEnd type="none" w="med" len="med"/>
-                    </a:lnT>
-                    <a:lnB w="6350" cap="flat" cmpd="sng" algn="ctr">
-                      <a:solidFill>
-                        <a:srgbClr val="DDDDDD"/>
-                      </a:solidFill>
-                      <a:prstDash val="solid"/>
-                      <a:round/>
-                      <a:headEnd type="none" w="med" len="med"/>
-                      <a:tailEnd type="none" w="med" len="med"/>
-                    </a:lnB>
-                    <a:solidFill>
-                      <a:srgbClr val="FFFFFF"/>
-                    </a:solidFill>
-                  </a:tcPr>
-                </a:tc>
-                <a:tc>
-                  <a:txBody>
-                    <a:bodyPr/>
-                    <a:lstStyle/>
-                    <a:p>
-                      <a:pPr marL="0" indent="0">
-                        <a:buNone/>
-                      </a:pPr>
-                      <a:r>
-                        <a:rPr lang="en-US" sz="1050" dirty="0">
-                          <a:solidFill>
-                            <a:srgbClr val="000000"/>
-                          </a:solidFill>
-                          <a:latin typeface="Calibri" pitchFamily="34" charset="0"/>
-                          <a:ea typeface="Calibri" pitchFamily="34" charset="-122"/>
-                          <a:cs typeface="Calibri" pitchFamily="34" charset="-120"/>
-                        </a:rPr>
-                        <a:t>The protective effect becomes more meaningful in stress scenarios more severe than 2008</a:t>
-                      </a:r>
-                      <a:endParaRPr lang="en-US" sz="1050" dirty="0">
-                        <a:latin typeface="Calibri" charset="0"/>
-                        <a:ea typeface="Calibri" charset="0"/>
-                        <a:cs typeface="Calibri" charset="0"/>
-                      </a:endParaRPr>
-                    </a:p>
-                  </a:txBody>
-                  <a:tcPr>
-                    <a:lnL w="6350" cap="flat" cmpd="sng" algn="ctr">
-                      <a:solidFill>
-                        <a:srgbClr val="DDDDDD"/>
-                      </a:solidFill>
-                      <a:prstDash val="solid"/>
-                      <a:round/>
-                      <a:headEnd type="none" w="med" len="med"/>
-                      <a:tailEnd type="none" w="med" len="med"/>
-                    </a:lnL>
-                    <a:lnR w="6350" cap="flat" cmpd="sng" algn="ctr">
-                      <a:solidFill>
-                        <a:srgbClr val="DDDDDD"/>
-                      </a:solidFill>
-                      <a:prstDash val="solid"/>
-                      <a:round/>
-                      <a:headEnd type="none" w="med" len="med"/>
-                      <a:tailEnd type="none" w="med" len="med"/>
-                    </a:lnR>
-                    <a:lnT w="6350" cap="flat" cmpd="sng" algn="ctr">
-                      <a:solidFill>
-                        <a:srgbClr val="DDDDDD"/>
-                      </a:solidFill>
-                      <a:prstDash val="solid"/>
-                      <a:round/>
-                      <a:headEnd type="none" w="med" len="med"/>
-                      <a:tailEnd type="none" w="med" len="med"/>
-                    </a:lnT>
-                    <a:lnB w="6350" cap="flat" cmpd="sng" algn="ctr">
-                      <a:solidFill>
-                        <a:srgbClr val="DDDDDD"/>
-                      </a:solidFill>
-                      <a:prstDash val="solid"/>
-                      <a:round/>
-                      <a:headEnd type="none" w="med" len="med"/>
-                      <a:tailEnd type="none" w="med" len="med"/>
-                    </a:lnB>
-                    <a:solidFill>
-                      <a:srgbClr val="FFFFFF"/>
-                    </a:solidFill>
-                  </a:tcPr>
-                </a:tc>
-                <a:extLst>
-                  <a:ext uri="{0D108BD9-81ED-4DB2-BD59-A6C34878D82A}">
-                    <a16:rowId xmlns:a16="http://schemas.microsoft.com/office/drawing/2014/main" val="10003"/>
-                  </a:ext>
-                </a:extLst>
-              </a:tr>
-            </a:tbl>
-          </a:graphicData>
-        </a:graphic>
-      </p:graphicFrame>
-      <p:sp>
-        <p:nvSpPr>
-          <p:cNvPr id="29" name="Text 26"/>
-          <p:cNvSpPr/>
-          <p:nvPr/>
-        </p:nvSpPr>
-        <p:spPr>
-          <a:xfrm>
-            <a:off x="9144000" y="4983480"/>
-            <a:ext cx="4572000" cy="201168"/>
-          </a:xfrm>
-          <a:prstGeom prst="rect">
-            <a:avLst/>
-          </a:prstGeom>
-          <a:noFill/>
-          <a:ln/>
-        </p:spPr>
-        <p:txBody>
-          <a:bodyPr wrap="square" rtlCol="0" anchor="ctr"/>
-          <a:lstStyle/>
-          <a:p>
-            <a:pPr marL="0" indent="0">
-              <a:buNone/>
-            </a:pPr>
-            <a:r>
-              <a:rPr lang="en-US" sz="900" b="1" kern="0" spc="150" dirty="0">
-                <a:solidFill>
-                  <a:srgbClr val="C89728"/>
-                </a:solidFill>
-                <a:latin typeface="Calibri" pitchFamily="34" charset="0"/>
-                <a:ea typeface="Calibri" pitchFamily="34" charset="-122"/>
-                <a:cs typeface="Calibri" pitchFamily="34" charset="-120"/>
-              </a:rPr>
-              <a:t>SIMULATED FAILURE RATES AT 2008 SEVERITY</a:t>
-            </a:r>
-            <a:endParaRPr lang="en-US" sz="900" dirty="0"/>
-          </a:p>
-        </p:txBody>
-      </p:sp>
-      <p:graphicFrame>
-        <p:nvGraphicFramePr>
-          <p:cNvPr id="30" name="Chart 0"/>
-          <p:cNvGraphicFramePr/>
-          <p:nvPr/>
-        </p:nvGraphicFramePr>
-        <p:xfrm>
-          <a:off x="9052560" y="5166360"/>
-          <a:ext cx="3063240" cy="1417320"/>
+          <a:off x="9052560" y="5120640"/>
+          <a:ext cx="3063240" cy="1508760"/>
         </p:xfrm>
         <a:graphic>
           <a:graphicData uri="http://schemas.openxmlformats.org/drawingml/2006/chart">
@@ -19530,14 +19952,14 @@
       </p:graphicFrame>
       <p:sp>
         <p:nvSpPr>
-          <p:cNvPr id="31" name="Text 27"/>
-          <p:cNvSpPr/>
-          <p:nvPr/>
-        </p:nvSpPr>
-        <p:spPr>
-          <a:xfrm>
-            <a:off x="9052560" y="6601968"/>
-            <a:ext cx="3063240" cy="228600"/>
+          <p:cNvPr id="37" name="Text 34"/>
+          <p:cNvSpPr/>
+          <p:nvPr/>
+        </p:nvSpPr>
+        <p:spPr>
+          <a:xfrm>
+            <a:off x="9052560" y="6656832"/>
+            <a:ext cx="3063240" cy="201168"/>
           </a:xfrm>
           <a:prstGeom prst="rect">
             <a:avLst/>
